--- a/docs/review1/ChainGuard_Review1_Progress.pptx
+++ b/docs/review1/ChainGuard_Review1_Progress.pptx
@@ -5553,7 +5553,7 @@
       </p:sp>
       <p:sp>
         <p:nvSpPr>
-          <p:cNvPr id="14" name="Shape 12"/>
+          <p:cNvPr id="15" name="Text 13"/>
           <p:cNvSpPr/>
           <p:nvPr/>
         </p:nvSpPr>
@@ -5562,33 +5562,6 @@
             <a:off x="10515600" y="2112264"/>
             <a:ext cx="1051560" cy="237744"/>
           </a:xfrm>
-          <a:prstGeom prst="roundRect">
-            <a:avLst>
-              <a:gd name="adj" fmla="val 15385"/>
-            </a:avLst>
-          </a:prstGeom>
-          <a:solidFill>
-            <a:srgbClr val="E4F4EF"/>
-          </a:solidFill>
-          <a:ln w="12700">
-            <a:solidFill>
-              <a:srgbClr val="E4F4EF"/>
-            </a:solidFill>
-            <a:prstDash val="solid"/>
-          </a:ln>
-        </p:spPr>
-      </p:sp>
-      <p:sp>
-        <p:nvSpPr>
-          <p:cNvPr id="15" name="Text 13"/>
-          <p:cNvSpPr/>
-          <p:nvPr/>
-        </p:nvSpPr>
-        <p:spPr>
-          <a:xfrm>
-            <a:off x="10515600" y="2112264"/>
-            <a:ext cx="1051560" cy="237744"/>
-          </a:xfrm>
           <a:prstGeom prst="rect">
             <a:avLst/>
           </a:prstGeom>
@@ -5601,17 +5574,6 @@
             <a:pPr marL="0" indent="0" algn="ctr">
               <a:buNone/>
             </a:pPr>
-            <a:r>
-              <a:rPr lang="en-US" sz="850" b="1" kern="0" spc="80" dirty="0">
-                <a:solidFill>
-                  <a:srgbClr val="0B7A5A"/>
-                </a:solidFill>
-                <a:latin typeface="Calibri" panose="020F0502020204030204" pitchFamily="34" charset="0"/>
-                <a:ea typeface="Calibri" panose="020F0502020204030204" pitchFamily="34" charset="-122"/>
-                <a:cs typeface="Calibri" panose="020F0502020204030204" pitchFamily="34" charset="-120"/>
-              </a:rPr>
-              <a:t>BUILT</a:t>
-            </a:r>
             <a:endParaRPr lang="en-US" sz="850" dirty="0"/>
           </a:p>
         </p:txBody>
@@ -5694,7 +5656,7 @@
       </p:sp>
       <p:sp>
         <p:nvSpPr>
-          <p:cNvPr id="18" name="Shape 16"/>
+          <p:cNvPr id="19" name="Text 17"/>
           <p:cNvSpPr/>
           <p:nvPr/>
         </p:nvSpPr>
@@ -5703,33 +5665,6 @@
             <a:off x="10515600" y="3099816"/>
             <a:ext cx="1051560" cy="237744"/>
           </a:xfrm>
-          <a:prstGeom prst="roundRect">
-            <a:avLst>
-              <a:gd name="adj" fmla="val 15385"/>
-            </a:avLst>
-          </a:prstGeom>
-          <a:solidFill>
-            <a:srgbClr val="E4F4EF"/>
-          </a:solidFill>
-          <a:ln w="12700">
-            <a:solidFill>
-              <a:srgbClr val="E4F4EF"/>
-            </a:solidFill>
-            <a:prstDash val="solid"/>
-          </a:ln>
-        </p:spPr>
-      </p:sp>
-      <p:sp>
-        <p:nvSpPr>
-          <p:cNvPr id="19" name="Text 17"/>
-          <p:cNvSpPr/>
-          <p:nvPr/>
-        </p:nvSpPr>
-        <p:spPr>
-          <a:xfrm>
-            <a:off x="10515600" y="3099816"/>
-            <a:ext cx="1051560" cy="237744"/>
-          </a:xfrm>
           <a:prstGeom prst="rect">
             <a:avLst/>
           </a:prstGeom>
@@ -5742,17 +5677,6 @@
             <a:pPr marL="0" indent="0" algn="ctr">
               <a:buNone/>
             </a:pPr>
-            <a:r>
-              <a:rPr lang="en-US" sz="850" b="1" kern="0" spc="80" dirty="0">
-                <a:solidFill>
-                  <a:srgbClr val="0B7A5A"/>
-                </a:solidFill>
-                <a:latin typeface="Calibri" panose="020F0502020204030204" pitchFamily="34" charset="0"/>
-                <a:ea typeface="Calibri" panose="020F0502020204030204" pitchFamily="34" charset="-122"/>
-                <a:cs typeface="Calibri" panose="020F0502020204030204" pitchFamily="34" charset="-120"/>
-              </a:rPr>
-              <a:t>BUILT</a:t>
-            </a:r>
             <a:endParaRPr lang="en-US" sz="850" dirty="0"/>
           </a:p>
         </p:txBody>
@@ -5835,7 +5759,7 @@
       </p:sp>
       <p:sp>
         <p:nvSpPr>
-          <p:cNvPr id="22" name="Shape 20"/>
+          <p:cNvPr id="23" name="Text 21"/>
           <p:cNvSpPr/>
           <p:nvPr/>
         </p:nvSpPr>
@@ -5844,33 +5768,6 @@
             <a:off x="10515600" y="4087368"/>
             <a:ext cx="1051560" cy="237744"/>
           </a:xfrm>
-          <a:prstGeom prst="roundRect">
-            <a:avLst>
-              <a:gd name="adj" fmla="val 15385"/>
-            </a:avLst>
-          </a:prstGeom>
-          <a:solidFill>
-            <a:srgbClr val="FBF2DF"/>
-          </a:solidFill>
-          <a:ln w="12700">
-            <a:solidFill>
-              <a:srgbClr val="FBF2DF"/>
-            </a:solidFill>
-            <a:prstDash val="solid"/>
-          </a:ln>
-        </p:spPr>
-      </p:sp>
-      <p:sp>
-        <p:nvSpPr>
-          <p:cNvPr id="23" name="Text 21"/>
-          <p:cNvSpPr/>
-          <p:nvPr/>
-        </p:nvSpPr>
-        <p:spPr>
-          <a:xfrm>
-            <a:off x="10515600" y="4087368"/>
-            <a:ext cx="1051560" cy="237744"/>
-          </a:xfrm>
           <a:prstGeom prst="rect">
             <a:avLst/>
           </a:prstGeom>
@@ -5883,17 +5780,6 @@
             <a:pPr marL="0" indent="0" algn="ctr">
               <a:buNone/>
             </a:pPr>
-            <a:r>
-              <a:rPr lang="en-US" sz="850" b="1" kern="0" spc="80" dirty="0">
-                <a:solidFill>
-                  <a:srgbClr val="C88A1E"/>
-                </a:solidFill>
-                <a:latin typeface="Calibri" panose="020F0502020204030204" pitchFamily="34" charset="0"/>
-                <a:ea typeface="Calibri" panose="020F0502020204030204" pitchFamily="34" charset="-122"/>
-                <a:cs typeface="Calibri" panose="020F0502020204030204" pitchFamily="34" charset="-120"/>
-              </a:rPr>
-              <a:t>IN PROGRESS</a:t>
-            </a:r>
             <a:endParaRPr lang="en-US" sz="850" dirty="0"/>
           </a:p>
         </p:txBody>
@@ -5976,7 +5862,7 @@
       </p:sp>
       <p:sp>
         <p:nvSpPr>
-          <p:cNvPr id="26" name="Shape 24"/>
+          <p:cNvPr id="27" name="Text 25"/>
           <p:cNvSpPr/>
           <p:nvPr/>
         </p:nvSpPr>
@@ -5985,33 +5871,6 @@
             <a:off x="10515600" y="5074920"/>
             <a:ext cx="1051560" cy="237744"/>
           </a:xfrm>
-          <a:prstGeom prst="roundRect">
-            <a:avLst>
-              <a:gd name="adj" fmla="val 15385"/>
-            </a:avLst>
-          </a:prstGeom>
-          <a:solidFill>
-            <a:srgbClr val="EAEEF1"/>
-          </a:solidFill>
-          <a:ln w="12700">
-            <a:solidFill>
-              <a:srgbClr val="EAEEF1"/>
-            </a:solidFill>
-            <a:prstDash val="solid"/>
-          </a:ln>
-        </p:spPr>
-      </p:sp>
-      <p:sp>
-        <p:nvSpPr>
-          <p:cNvPr id="27" name="Text 25"/>
-          <p:cNvSpPr/>
-          <p:nvPr/>
-        </p:nvSpPr>
-        <p:spPr>
-          <a:xfrm>
-            <a:off x="10515600" y="5074920"/>
-            <a:ext cx="1051560" cy="237744"/>
-          </a:xfrm>
           <a:prstGeom prst="rect">
             <a:avLst/>
           </a:prstGeom>
@@ -6024,17 +5883,6 @@
             <a:pPr marL="0" indent="0" algn="ctr">
               <a:buNone/>
             </a:pPr>
-            <a:r>
-              <a:rPr lang="en-US" sz="850" b="1" kern="0" spc="80" dirty="0">
-                <a:solidFill>
-                  <a:srgbClr val="5A6B78"/>
-                </a:solidFill>
-                <a:latin typeface="Calibri" panose="020F0502020204030204" pitchFamily="34" charset="0"/>
-                <a:ea typeface="Calibri" panose="020F0502020204030204" pitchFamily="34" charset="-122"/>
-                <a:cs typeface="Calibri" panose="020F0502020204030204" pitchFamily="34" charset="-120"/>
-              </a:rPr>
-              <a:t>NEXT</a:t>
-            </a:r>
             <a:endParaRPr lang="en-US" sz="850" dirty="0"/>
           </a:p>
         </p:txBody>
@@ -6277,7 +6125,11 @@
         <p:nvSpPr>
           <p:cNvPr id="6" name="Shape 4"/>
           <p:cNvSpPr/>
-          <p:nvPr/>
+          <p:nvPr>
+            <p:custDataLst>
+              <p:tags r:id="rId1"/>
+            </p:custDataLst>
+          </p:nvPr>
         </p:nvSpPr>
         <p:spPr>
           <a:xfrm>
@@ -6304,7 +6156,11 @@
         <p:nvSpPr>
           <p:cNvPr id="7" name="Shape 5"/>
           <p:cNvSpPr/>
-          <p:nvPr/>
+          <p:nvPr>
+            <p:custDataLst>
+              <p:tags r:id="rId2"/>
+            </p:custDataLst>
+          </p:nvPr>
         </p:nvSpPr>
         <p:spPr>
           <a:xfrm>
@@ -6323,7 +6179,11 @@
         <p:nvSpPr>
           <p:cNvPr id="8" name="Text 6"/>
           <p:cNvSpPr/>
-          <p:nvPr/>
+          <p:nvPr>
+            <p:custDataLst>
+              <p:tags r:id="rId3"/>
+            </p:custDataLst>
+          </p:nvPr>
         </p:nvSpPr>
         <p:spPr>
           <a:xfrm>
@@ -6361,7 +6221,11 @@
         <p:nvSpPr>
           <p:cNvPr id="9" name="Text 7"/>
           <p:cNvSpPr/>
-          <p:nvPr/>
+          <p:nvPr>
+            <p:custDataLst>
+              <p:tags r:id="rId4"/>
+            </p:custDataLst>
+          </p:nvPr>
         </p:nvSpPr>
         <p:spPr>
           <a:xfrm>
@@ -6397,74 +6261,13 @@
       </p:sp>
       <p:sp>
         <p:nvSpPr>
-          <p:cNvPr id="10" name="Shape 8"/>
-          <p:cNvSpPr/>
-          <p:nvPr/>
-        </p:nvSpPr>
-        <p:spPr>
-          <a:xfrm>
-            <a:off x="7086600" y="1947672"/>
-            <a:ext cx="1188720" cy="237744"/>
-          </a:xfrm>
-          <a:prstGeom prst="roundRect">
-            <a:avLst>
-              <a:gd name="adj" fmla="val 15385"/>
-            </a:avLst>
-          </a:prstGeom>
-          <a:solidFill>
-            <a:srgbClr val="FBF2DF"/>
-          </a:solidFill>
-          <a:ln w="12700">
-            <a:solidFill>
-              <a:srgbClr val="FBF2DF"/>
-            </a:solidFill>
-            <a:prstDash val="solid"/>
-          </a:ln>
-        </p:spPr>
-      </p:sp>
-      <p:sp>
-        <p:nvSpPr>
-          <p:cNvPr id="11" name="Text 9"/>
-          <p:cNvSpPr/>
-          <p:nvPr/>
-        </p:nvSpPr>
-        <p:spPr>
-          <a:xfrm>
-            <a:off x="7086600" y="1947672"/>
-            <a:ext cx="1188720" cy="237744"/>
-          </a:xfrm>
-          <a:prstGeom prst="rect">
-            <a:avLst/>
-          </a:prstGeom>
-          <a:noFill/>
-        </p:spPr>
-        <p:txBody>
-          <a:bodyPr wrap="square" lIns="0" tIns="0" rIns="0" bIns="0" rtlCol="0" anchor="ctr"/>
-          <a:lstStyle/>
-          <a:p>
-            <a:pPr marL="0" indent="0" algn="ctr">
-              <a:buNone/>
-            </a:pPr>
-            <a:r>
-              <a:rPr lang="en-US" sz="850" b="1" kern="0" spc="80" dirty="0">
-                <a:solidFill>
-                  <a:srgbClr val="C88A1E"/>
-                </a:solidFill>
-                <a:latin typeface="Calibri" panose="020F0502020204030204" pitchFamily="34" charset="0"/>
-                <a:ea typeface="Calibri" panose="020F0502020204030204" pitchFamily="34" charset="-122"/>
-                <a:cs typeface="Calibri" panose="020F0502020204030204" pitchFamily="34" charset="-120"/>
-              </a:rPr>
-              <a:t>IN PROGRESS</a:t>
-            </a:r>
-            <a:endParaRPr lang="en-US" sz="850" dirty="0"/>
-          </a:p>
-        </p:txBody>
-      </p:sp>
-      <p:sp>
-        <p:nvSpPr>
           <p:cNvPr id="12" name="Shape 10"/>
           <p:cNvSpPr/>
-          <p:nvPr/>
+          <p:nvPr>
+            <p:custDataLst>
+              <p:tags r:id="rId5"/>
+            </p:custDataLst>
+          </p:nvPr>
         </p:nvSpPr>
         <p:spPr>
           <a:xfrm>
@@ -6491,7 +6294,11 @@
         <p:nvSpPr>
           <p:cNvPr id="13" name="Shape 11"/>
           <p:cNvSpPr/>
-          <p:nvPr/>
+          <p:nvPr>
+            <p:custDataLst>
+              <p:tags r:id="rId6"/>
+            </p:custDataLst>
+          </p:nvPr>
         </p:nvSpPr>
         <p:spPr>
           <a:xfrm>
@@ -6510,7 +6317,11 @@
         <p:nvSpPr>
           <p:cNvPr id="14" name="Text 12"/>
           <p:cNvSpPr/>
-          <p:nvPr/>
+          <p:nvPr>
+            <p:custDataLst>
+              <p:tags r:id="rId7"/>
+            </p:custDataLst>
+          </p:nvPr>
         </p:nvSpPr>
         <p:spPr>
           <a:xfrm>
@@ -6548,7 +6359,11 @@
         <p:nvSpPr>
           <p:cNvPr id="15" name="Text 13"/>
           <p:cNvSpPr/>
-          <p:nvPr/>
+          <p:nvPr>
+            <p:custDataLst>
+              <p:tags r:id="rId8"/>
+            </p:custDataLst>
+          </p:nvPr>
         </p:nvSpPr>
         <p:spPr>
           <a:xfrm>
@@ -6584,42 +6399,19 @@
       </p:sp>
       <p:sp>
         <p:nvSpPr>
-          <p:cNvPr id="16" name="Shape 14"/>
-          <p:cNvSpPr/>
-          <p:nvPr/>
+          <p:cNvPr id="17" name="Text 15"/>
+          <p:cNvSpPr/>
+          <p:nvPr>
+            <p:custDataLst>
+              <p:tags r:id="rId9"/>
+            </p:custDataLst>
+          </p:nvPr>
         </p:nvSpPr>
         <p:spPr>
           <a:xfrm>
             <a:off x="7086600" y="2816352"/>
             <a:ext cx="1188720" cy="237744"/>
           </a:xfrm>
-          <a:prstGeom prst="roundRect">
-            <a:avLst>
-              <a:gd name="adj" fmla="val 15385"/>
-            </a:avLst>
-          </a:prstGeom>
-          <a:solidFill>
-            <a:srgbClr val="E4F4EF"/>
-          </a:solidFill>
-          <a:ln w="12700">
-            <a:solidFill>
-              <a:srgbClr val="E4F4EF"/>
-            </a:solidFill>
-            <a:prstDash val="solid"/>
-          </a:ln>
-        </p:spPr>
-      </p:sp>
-      <p:sp>
-        <p:nvSpPr>
-          <p:cNvPr id="17" name="Text 15"/>
-          <p:cNvSpPr/>
-          <p:nvPr/>
-        </p:nvSpPr>
-        <p:spPr>
-          <a:xfrm>
-            <a:off x="7086600" y="2816352"/>
-            <a:ext cx="1188720" cy="237744"/>
-          </a:xfrm>
           <a:prstGeom prst="rect">
             <a:avLst/>
           </a:prstGeom>
@@ -6632,17 +6424,6 @@
             <a:pPr marL="0" indent="0" algn="ctr">
               <a:buNone/>
             </a:pPr>
-            <a:r>
-              <a:rPr lang="en-US" sz="850" b="1" kern="0" spc="80" dirty="0">
-                <a:solidFill>
-                  <a:srgbClr val="0B7A5A"/>
-                </a:solidFill>
-                <a:latin typeface="Calibri" panose="020F0502020204030204" pitchFamily="34" charset="0"/>
-                <a:ea typeface="Calibri" panose="020F0502020204030204" pitchFamily="34" charset="-122"/>
-                <a:cs typeface="Calibri" panose="020F0502020204030204" pitchFamily="34" charset="-120"/>
-              </a:rPr>
-              <a:t>BUILT</a:t>
-            </a:r>
             <a:endParaRPr lang="en-US" sz="850" dirty="0"/>
           </a:p>
         </p:txBody>
@@ -6651,7 +6432,11 @@
         <p:nvSpPr>
           <p:cNvPr id="18" name="Shape 16"/>
           <p:cNvSpPr/>
-          <p:nvPr/>
+          <p:nvPr>
+            <p:custDataLst>
+              <p:tags r:id="rId10"/>
+            </p:custDataLst>
+          </p:nvPr>
         </p:nvSpPr>
         <p:spPr>
           <a:xfrm>
@@ -6678,7 +6463,11 @@
         <p:nvSpPr>
           <p:cNvPr id="19" name="Shape 17"/>
           <p:cNvSpPr/>
-          <p:nvPr/>
+          <p:nvPr>
+            <p:custDataLst>
+              <p:tags r:id="rId11"/>
+            </p:custDataLst>
+          </p:nvPr>
         </p:nvSpPr>
         <p:spPr>
           <a:xfrm>
@@ -6697,7 +6486,11 @@
         <p:nvSpPr>
           <p:cNvPr id="20" name="Text 18"/>
           <p:cNvSpPr/>
-          <p:nvPr/>
+          <p:nvPr>
+            <p:custDataLst>
+              <p:tags r:id="rId12"/>
+            </p:custDataLst>
+          </p:nvPr>
         </p:nvSpPr>
         <p:spPr>
           <a:xfrm>
@@ -6735,7 +6528,11 @@
         <p:nvSpPr>
           <p:cNvPr id="21" name="Text 19"/>
           <p:cNvSpPr/>
-          <p:nvPr/>
+          <p:nvPr>
+            <p:custDataLst>
+              <p:tags r:id="rId13"/>
+            </p:custDataLst>
+          </p:nvPr>
         </p:nvSpPr>
         <p:spPr>
           <a:xfrm>
@@ -6771,42 +6568,19 @@
       </p:sp>
       <p:sp>
         <p:nvSpPr>
-          <p:cNvPr id="22" name="Shape 20"/>
-          <p:cNvSpPr/>
-          <p:nvPr/>
+          <p:cNvPr id="23" name="Text 21"/>
+          <p:cNvSpPr/>
+          <p:nvPr>
+            <p:custDataLst>
+              <p:tags r:id="rId14"/>
+            </p:custDataLst>
+          </p:nvPr>
         </p:nvSpPr>
         <p:spPr>
           <a:xfrm>
             <a:off x="7086600" y="3685032"/>
             <a:ext cx="1188720" cy="237744"/>
           </a:xfrm>
-          <a:prstGeom prst="roundRect">
-            <a:avLst>
-              <a:gd name="adj" fmla="val 15385"/>
-            </a:avLst>
-          </a:prstGeom>
-          <a:solidFill>
-            <a:srgbClr val="FBF2DF"/>
-          </a:solidFill>
-          <a:ln w="12700">
-            <a:solidFill>
-              <a:srgbClr val="FBF2DF"/>
-            </a:solidFill>
-            <a:prstDash val="solid"/>
-          </a:ln>
-        </p:spPr>
-      </p:sp>
-      <p:sp>
-        <p:nvSpPr>
-          <p:cNvPr id="23" name="Text 21"/>
-          <p:cNvSpPr/>
-          <p:nvPr/>
-        </p:nvSpPr>
-        <p:spPr>
-          <a:xfrm>
-            <a:off x="7086600" y="3685032"/>
-            <a:ext cx="1188720" cy="237744"/>
-          </a:xfrm>
           <a:prstGeom prst="rect">
             <a:avLst/>
           </a:prstGeom>
@@ -6819,17 +6593,6 @@
             <a:pPr marL="0" indent="0" algn="ctr">
               <a:buNone/>
             </a:pPr>
-            <a:r>
-              <a:rPr lang="en-US" sz="850" b="1" kern="0" spc="80" dirty="0">
-                <a:solidFill>
-                  <a:srgbClr val="C88A1E"/>
-                </a:solidFill>
-                <a:latin typeface="Calibri" panose="020F0502020204030204" pitchFamily="34" charset="0"/>
-                <a:ea typeface="Calibri" panose="020F0502020204030204" pitchFamily="34" charset="-122"/>
-                <a:cs typeface="Calibri" panose="020F0502020204030204" pitchFamily="34" charset="-120"/>
-              </a:rPr>
-              <a:t>IN PROGRESS</a:t>
-            </a:r>
             <a:endParaRPr lang="en-US" sz="850" dirty="0"/>
           </a:p>
         </p:txBody>
@@ -6838,7 +6601,11 @@
         <p:nvSpPr>
           <p:cNvPr id="24" name="Shape 22"/>
           <p:cNvSpPr/>
-          <p:nvPr/>
+          <p:nvPr>
+            <p:custDataLst>
+              <p:tags r:id="rId15"/>
+            </p:custDataLst>
+          </p:nvPr>
         </p:nvSpPr>
         <p:spPr>
           <a:xfrm>
@@ -6865,7 +6632,11 @@
         <p:nvSpPr>
           <p:cNvPr id="25" name="Shape 23"/>
           <p:cNvSpPr/>
-          <p:nvPr/>
+          <p:nvPr>
+            <p:custDataLst>
+              <p:tags r:id="rId16"/>
+            </p:custDataLst>
+          </p:nvPr>
         </p:nvSpPr>
         <p:spPr>
           <a:xfrm>
@@ -6884,7 +6655,11 @@
         <p:nvSpPr>
           <p:cNvPr id="26" name="Text 24"/>
           <p:cNvSpPr/>
-          <p:nvPr/>
+          <p:nvPr>
+            <p:custDataLst>
+              <p:tags r:id="rId17"/>
+            </p:custDataLst>
+          </p:nvPr>
         </p:nvSpPr>
         <p:spPr>
           <a:xfrm>
@@ -6922,7 +6697,11 @@
         <p:nvSpPr>
           <p:cNvPr id="27" name="Text 25"/>
           <p:cNvSpPr/>
-          <p:nvPr/>
+          <p:nvPr>
+            <p:custDataLst>
+              <p:tags r:id="rId18"/>
+            </p:custDataLst>
+          </p:nvPr>
         </p:nvSpPr>
         <p:spPr>
           <a:xfrm>
@@ -6958,74 +6737,13 @@
       </p:sp>
       <p:sp>
         <p:nvSpPr>
-          <p:cNvPr id="28" name="Shape 26"/>
-          <p:cNvSpPr/>
-          <p:nvPr/>
-        </p:nvSpPr>
-        <p:spPr>
-          <a:xfrm>
-            <a:off x="7086600" y="4553712"/>
-            <a:ext cx="1188720" cy="237744"/>
-          </a:xfrm>
-          <a:prstGeom prst="roundRect">
-            <a:avLst>
-              <a:gd name="adj" fmla="val 15385"/>
-            </a:avLst>
-          </a:prstGeom>
-          <a:solidFill>
-            <a:srgbClr val="E4F4EF"/>
-          </a:solidFill>
-          <a:ln w="12700">
-            <a:solidFill>
-              <a:srgbClr val="E4F4EF"/>
-            </a:solidFill>
-            <a:prstDash val="solid"/>
-          </a:ln>
-        </p:spPr>
-      </p:sp>
-      <p:sp>
-        <p:nvSpPr>
-          <p:cNvPr id="29" name="Text 27"/>
-          <p:cNvSpPr/>
-          <p:nvPr/>
-        </p:nvSpPr>
-        <p:spPr>
-          <a:xfrm>
-            <a:off x="7086600" y="4553712"/>
-            <a:ext cx="1188720" cy="237744"/>
-          </a:xfrm>
-          <a:prstGeom prst="rect">
-            <a:avLst/>
-          </a:prstGeom>
-          <a:noFill/>
-        </p:spPr>
-        <p:txBody>
-          <a:bodyPr wrap="square" lIns="0" tIns="0" rIns="0" bIns="0" rtlCol="0" anchor="ctr"/>
-          <a:lstStyle/>
-          <a:p>
-            <a:pPr marL="0" indent="0" algn="ctr">
-              <a:buNone/>
-            </a:pPr>
-            <a:r>
-              <a:rPr lang="en-US" sz="850" b="1" kern="0" spc="80" dirty="0">
-                <a:solidFill>
-                  <a:srgbClr val="0B7A5A"/>
-                </a:solidFill>
-                <a:latin typeface="Calibri" panose="020F0502020204030204" pitchFamily="34" charset="0"/>
-                <a:ea typeface="Calibri" panose="020F0502020204030204" pitchFamily="34" charset="-122"/>
-                <a:cs typeface="Calibri" panose="020F0502020204030204" pitchFamily="34" charset="-120"/>
-              </a:rPr>
-              <a:t>BUILT</a:t>
-            </a:r>
-            <a:endParaRPr lang="en-US" sz="850" dirty="0"/>
-          </a:p>
-        </p:txBody>
-      </p:sp>
-      <p:sp>
-        <p:nvSpPr>
           <p:cNvPr id="30" name="Shape 28"/>
           <p:cNvSpPr/>
-          <p:nvPr/>
+          <p:nvPr>
+            <p:custDataLst>
+              <p:tags r:id="rId19"/>
+            </p:custDataLst>
+          </p:nvPr>
         </p:nvSpPr>
         <p:spPr>
           <a:xfrm>
@@ -7052,7 +6770,11 @@
         <p:nvSpPr>
           <p:cNvPr id="31" name="Shape 29"/>
           <p:cNvSpPr/>
-          <p:nvPr/>
+          <p:nvPr>
+            <p:custDataLst>
+              <p:tags r:id="rId20"/>
+            </p:custDataLst>
+          </p:nvPr>
         </p:nvSpPr>
         <p:spPr>
           <a:xfrm>
@@ -7071,7 +6793,11 @@
         <p:nvSpPr>
           <p:cNvPr id="32" name="Text 30"/>
           <p:cNvSpPr/>
-          <p:nvPr/>
+          <p:nvPr>
+            <p:custDataLst>
+              <p:tags r:id="rId21"/>
+            </p:custDataLst>
+          </p:nvPr>
         </p:nvSpPr>
         <p:spPr>
           <a:xfrm>
@@ -7109,7 +6835,11 @@
         <p:nvSpPr>
           <p:cNvPr id="33" name="Text 31"/>
           <p:cNvSpPr/>
-          <p:nvPr/>
+          <p:nvPr>
+            <p:custDataLst>
+              <p:tags r:id="rId22"/>
+            </p:custDataLst>
+          </p:nvPr>
         </p:nvSpPr>
         <p:spPr>
           <a:xfrm>
@@ -7140,71 +6870,6 @@
               <a:t>Scan history    Sample store    Download cache    Saved model</a:t>
             </a:r>
             <a:endParaRPr lang="en-US" sz="1000" dirty="0"/>
-          </a:p>
-        </p:txBody>
-      </p:sp>
-      <p:sp>
-        <p:nvSpPr>
-          <p:cNvPr id="34" name="Shape 32"/>
-          <p:cNvSpPr/>
-          <p:nvPr/>
-        </p:nvSpPr>
-        <p:spPr>
-          <a:xfrm>
-            <a:off x="7086600" y="5422392"/>
-            <a:ext cx="1188720" cy="237744"/>
-          </a:xfrm>
-          <a:prstGeom prst="roundRect">
-            <a:avLst>
-              <a:gd name="adj" fmla="val 15385"/>
-            </a:avLst>
-          </a:prstGeom>
-          <a:solidFill>
-            <a:srgbClr val="E4F4EF"/>
-          </a:solidFill>
-          <a:ln w="12700">
-            <a:solidFill>
-              <a:srgbClr val="E4F4EF"/>
-            </a:solidFill>
-            <a:prstDash val="solid"/>
-          </a:ln>
-        </p:spPr>
-      </p:sp>
-      <p:sp>
-        <p:nvSpPr>
-          <p:cNvPr id="35" name="Text 33"/>
-          <p:cNvSpPr/>
-          <p:nvPr/>
-        </p:nvSpPr>
-        <p:spPr>
-          <a:xfrm>
-            <a:off x="7086600" y="5422392"/>
-            <a:ext cx="1188720" cy="237744"/>
-          </a:xfrm>
-          <a:prstGeom prst="rect">
-            <a:avLst/>
-          </a:prstGeom>
-          <a:noFill/>
-        </p:spPr>
-        <p:txBody>
-          <a:bodyPr wrap="square" lIns="0" tIns="0" rIns="0" bIns="0" rtlCol="0" anchor="ctr"/>
-          <a:lstStyle/>
-          <a:p>
-            <a:pPr marL="0" indent="0" algn="ctr">
-              <a:buNone/>
-            </a:pPr>
-            <a:r>
-              <a:rPr lang="en-US" sz="850" b="1" kern="0" spc="80" dirty="0">
-                <a:solidFill>
-                  <a:srgbClr val="0B7A5A"/>
-                </a:solidFill>
-                <a:latin typeface="Calibri" panose="020F0502020204030204" pitchFamily="34" charset="0"/>
-                <a:ea typeface="Calibri" panose="020F0502020204030204" pitchFamily="34" charset="-122"/>
-                <a:cs typeface="Calibri" panose="020F0502020204030204" pitchFamily="34" charset="-120"/>
-              </a:rPr>
-              <a:t>BUILT</a:t>
-            </a:r>
-            <a:endParaRPr lang="en-US" sz="850" dirty="0"/>
           </a:p>
         </p:txBody>
       </p:sp>
@@ -7311,7 +6976,7 @@
         </p:nvSpPr>
         <p:spPr>
           <a:xfrm>
-            <a:off x="9006840" y="2651760"/>
+            <a:off x="9006840" y="2560320"/>
             <a:ext cx="2560320" cy="457200"/>
           </a:xfrm>
           <a:prstGeom prst="rect">
@@ -7368,7 +7033,7 @@
         </p:nvSpPr>
         <p:spPr>
           <a:xfrm>
-            <a:off x="9006840" y="3218688"/>
+            <a:off x="9006840" y="3117723"/>
             <a:ext cx="2560320" cy="457200"/>
           </a:xfrm>
           <a:prstGeom prst="rect">
@@ -7425,7 +7090,7 @@
         </p:nvSpPr>
         <p:spPr>
           <a:xfrm>
-            <a:off x="9006840" y="3785616"/>
+            <a:off x="9006840" y="3675126"/>
             <a:ext cx="2560320" cy="457200"/>
           </a:xfrm>
           <a:prstGeom prst="rect">
@@ -7482,7 +7147,7 @@
         </p:nvSpPr>
         <p:spPr>
           <a:xfrm>
-            <a:off x="9006840" y="4352544"/>
+            <a:off x="9006840" y="4229354"/>
             <a:ext cx="2560320" cy="457200"/>
           </a:xfrm>
           <a:prstGeom prst="rect">
@@ -7539,7 +7204,7 @@
         </p:nvSpPr>
         <p:spPr>
           <a:xfrm>
-            <a:off x="9006840" y="4919472"/>
+            <a:off x="9006840" y="4840097"/>
             <a:ext cx="2560320" cy="457200"/>
           </a:xfrm>
           <a:prstGeom prst="rect">
@@ -7634,7 +7299,7 @@
       </p:grpSpPr>
       <p:sp>
         <p:nvSpPr>
-          <p:cNvPr id="2" name="Shape 0"/>
+          <p:cNvPr id="107" name="Shape 0"/>
           <p:cNvSpPr/>
           <p:nvPr/>
         </p:nvSpPr>
@@ -7653,7 +7318,7 @@
       </p:sp>
       <p:sp>
         <p:nvSpPr>
-          <p:cNvPr id="3" name="Text 1"/>
+          <p:cNvPr id="108" name="Text 1"/>
           <p:cNvSpPr/>
           <p:nvPr/>
         </p:nvSpPr>
@@ -7691,14 +7356,14 @@
       </p:sp>
       <p:sp>
         <p:nvSpPr>
-          <p:cNvPr id="4" name="Text 2"/>
+          <p:cNvPr id="109" name="Text 2"/>
           <p:cNvSpPr/>
           <p:nvPr/>
         </p:nvSpPr>
         <p:spPr>
           <a:xfrm>
             <a:off x="1014984" y="384048"/>
-            <a:ext cx="6400800" cy="310896"/>
+            <a:ext cx="5486400" cy="310896"/>
           </a:xfrm>
           <a:prstGeom prst="rect">
             <a:avLst/>
@@ -7729,7 +7394,7 @@
       </p:sp>
       <p:sp>
         <p:nvSpPr>
-          <p:cNvPr id="5" name="Text 3"/>
+          <p:cNvPr id="110" name="Text 3"/>
           <p:cNvSpPr/>
           <p:nvPr/>
         </p:nvSpPr>
@@ -7759,7 +7424,7 @@
                 <a:ea typeface="Cambria" panose="02040503050406030204" pitchFamily="34" charset="-122"/>
                 <a:cs typeface="Cambria" panose="02040503050406030204" pitchFamily="34" charset="-120"/>
               </a:rPr>
-              <a:t>The modules, and where each one stands</a:t>
+              <a:t>The 22 modules, and what each one owns</a:t>
             </a:r>
             <a:endParaRPr lang="en-US" sz="3000" dirty="0"/>
           </a:p>
@@ -7767,14 +7432,14 @@
       </p:sp>
       <p:sp>
         <p:nvSpPr>
-          <p:cNvPr id="6" name="Shape 4"/>
+          <p:cNvPr id="111" name="Shape 4"/>
           <p:cNvSpPr/>
           <p:nvPr/>
         </p:nvSpPr>
         <p:spPr>
           <a:xfrm>
             <a:off x="594360" y="1691640"/>
-            <a:ext cx="2615184" cy="3931920"/>
+            <a:ext cx="2615184" cy="3977640"/>
           </a:xfrm>
           <a:prstGeom prst="roundRect">
             <a:avLst>
@@ -7794,14 +7459,33 @@
       </p:sp>
       <p:sp>
         <p:nvSpPr>
-          <p:cNvPr id="7" name="Text 5"/>
-          <p:cNvSpPr/>
-          <p:nvPr/>
-        </p:nvSpPr>
-        <p:spPr>
-          <a:xfrm>
-            <a:off x="822960" y="1874520"/>
-            <a:ext cx="2194560" cy="457200"/>
+          <p:cNvPr id="112" name="Shape 5"/>
+          <p:cNvSpPr/>
+          <p:nvPr/>
+        </p:nvSpPr>
+        <p:spPr>
+          <a:xfrm>
+            <a:off x="822960" y="1901952"/>
+            <a:ext cx="256032" cy="256032"/>
+          </a:xfrm>
+          <a:prstGeom prst="rect">
+            <a:avLst/>
+          </a:prstGeom>
+          <a:solidFill>
+            <a:srgbClr val="5A6B78"/>
+          </a:solidFill>
+        </p:spPr>
+      </p:sp>
+      <p:sp>
+        <p:nvSpPr>
+          <p:cNvPr id="113" name="Text 6"/>
+          <p:cNvSpPr/>
+          <p:nvPr/>
+        </p:nvSpPr>
+        <p:spPr>
+          <a:xfrm>
+            <a:off x="822960" y="2240280"/>
+            <a:ext cx="2194560" cy="502920"/>
           </a:xfrm>
           <a:prstGeom prst="rect">
             <a:avLst/>
@@ -7832,31 +7516,35 @@
       </p:sp>
       <p:sp>
         <p:nvSpPr>
-          <p:cNvPr id="8" name="Text 6"/>
-          <p:cNvSpPr/>
-          <p:nvPr/>
-        </p:nvSpPr>
-        <p:spPr>
-          <a:xfrm>
-            <a:off x="822960" y="2395728"/>
-            <a:ext cx="2194560" cy="256032"/>
-          </a:xfrm>
-          <a:prstGeom prst="rect">
-            <a:avLst/>
-          </a:prstGeom>
-          <a:noFill/>
-        </p:spPr>
-        <p:txBody>
-          <a:bodyPr wrap="square" lIns="0" tIns="0" rIns="0" bIns="0" rtlCol="0" anchor="ctr"/>
-          <a:lstStyle/>
-          <a:p>
-            <a:pPr marL="0" indent="0">
-              <a:buNone/>
-            </a:pPr>
-            <a:r>
-              <a:rPr lang="en-US" sz="950" dirty="0">
-                <a:solidFill>
-                  <a:srgbClr val="1B2A33"/>
+          <p:cNvPr id="114" name="Text 7"/>
+          <p:cNvSpPr/>
+          <p:nvPr/>
+        </p:nvSpPr>
+        <p:spPr>
+          <a:xfrm>
+            <a:off x="822960" y="2761488"/>
+            <a:ext cx="2194560" cy="2743200"/>
+          </a:xfrm>
+          <a:prstGeom prst="rect">
+            <a:avLst/>
+          </a:prstGeom>
+          <a:noFill/>
+        </p:spPr>
+        <p:txBody>
+          <a:bodyPr wrap="square" lIns="0" tIns="0" rIns="0" bIns="0" rtlCol="0" anchor="ctr"/>
+          <a:lstStyle/>
+          <a:p>
+            <a:pPr marL="342900" indent="-342900">
+              <a:spcAft>
+                <a:spcPts val="600"/>
+              </a:spcAft>
+              <a:buSzPct val="100000"/>
+              <a:buChar char="•"/>
+            </a:pPr>
+            <a:r>
+              <a:rPr lang="en-US" sz="1000" dirty="0">
+                <a:solidFill>
+                  <a:srgbClr val="5A6B78"/>
                 </a:solidFill>
                 <a:latin typeface="Calibri" panose="020F0502020204030204" pitchFamily="34" charset="0"/>
                 <a:ea typeface="Calibri" panose="020F0502020204030204" pitchFamily="34" charset="-122"/>
@@ -7864,102 +7552,20 @@
               </a:rPr>
               <a:t>npm and PyPI clients</a:t>
             </a:r>
-            <a:endParaRPr lang="en-US" sz="950" dirty="0"/>
-          </a:p>
-        </p:txBody>
-      </p:sp>
-      <p:sp>
-        <p:nvSpPr>
-          <p:cNvPr id="9" name="Shape 7"/>
-          <p:cNvSpPr/>
-          <p:nvPr/>
-        </p:nvSpPr>
-        <p:spPr>
-          <a:xfrm>
-            <a:off x="822960" y="2633472"/>
-            <a:ext cx="841248" cy="237744"/>
-          </a:xfrm>
-          <a:prstGeom prst="roundRect">
-            <a:avLst>
-              <a:gd name="adj" fmla="val 15385"/>
-            </a:avLst>
-          </a:prstGeom>
-          <a:solidFill>
-            <a:srgbClr val="E4F4EF"/>
-          </a:solidFill>
-          <a:ln w="12700">
-            <a:solidFill>
-              <a:srgbClr val="E4F4EF"/>
-            </a:solidFill>
-            <a:prstDash val="solid"/>
-          </a:ln>
-        </p:spPr>
-      </p:sp>
-      <p:sp>
-        <p:nvSpPr>
-          <p:cNvPr id="10" name="Text 8"/>
-          <p:cNvSpPr/>
-          <p:nvPr/>
-        </p:nvSpPr>
-        <p:spPr>
-          <a:xfrm>
-            <a:off x="822960" y="2633472"/>
-            <a:ext cx="841248" cy="237744"/>
-          </a:xfrm>
-          <a:prstGeom prst="rect">
-            <a:avLst/>
-          </a:prstGeom>
-          <a:noFill/>
-        </p:spPr>
-        <p:txBody>
-          <a:bodyPr wrap="square" lIns="0" tIns="0" rIns="0" bIns="0" rtlCol="0" anchor="ctr"/>
-          <a:lstStyle/>
-          <a:p>
-            <a:pPr marL="0" indent="0" algn="ctr">
-              <a:buNone/>
-            </a:pPr>
-            <a:r>
-              <a:rPr lang="en-US" sz="850" b="1" kern="0" spc="80" dirty="0">
-                <a:solidFill>
-                  <a:srgbClr val="0B7A5A"/>
-                </a:solidFill>
-                <a:latin typeface="Calibri" panose="020F0502020204030204" pitchFamily="34" charset="0"/>
-                <a:ea typeface="Calibri" panose="020F0502020204030204" pitchFamily="34" charset="-122"/>
-                <a:cs typeface="Calibri" panose="020F0502020204030204" pitchFamily="34" charset="-120"/>
-              </a:rPr>
-              <a:t>BUILT</a:t>
-            </a:r>
-            <a:endParaRPr lang="en-US" sz="850" dirty="0"/>
-          </a:p>
-        </p:txBody>
-      </p:sp>
-      <p:sp>
-        <p:nvSpPr>
-          <p:cNvPr id="11" name="Text 9"/>
-          <p:cNvSpPr/>
-          <p:nvPr/>
-        </p:nvSpPr>
-        <p:spPr>
-          <a:xfrm>
-            <a:off x="822960" y="2907792"/>
-            <a:ext cx="2194560" cy="256032"/>
-          </a:xfrm>
-          <a:prstGeom prst="rect">
-            <a:avLst/>
-          </a:prstGeom>
-          <a:noFill/>
-        </p:spPr>
-        <p:txBody>
-          <a:bodyPr wrap="square" lIns="0" tIns="0" rIns="0" bIns="0" rtlCol="0" anchor="ctr"/>
-          <a:lstStyle/>
-          <a:p>
-            <a:pPr marL="0" indent="0">
-              <a:buNone/>
-            </a:pPr>
-            <a:r>
-              <a:rPr lang="en-US" sz="950" dirty="0">
-                <a:solidFill>
-                  <a:srgbClr val="1B2A33"/>
+            <a:endParaRPr lang="en-US" sz="1000" dirty="0"/>
+          </a:p>
+          <a:p>
+            <a:pPr marL="342900" indent="-342900">
+              <a:spcAft>
+                <a:spcPts val="600"/>
+              </a:spcAft>
+              <a:buSzPct val="100000"/>
+              <a:buChar char="•"/>
+            </a:pPr>
+            <a:r>
+              <a:rPr lang="en-US" sz="1000" dirty="0">
+                <a:solidFill>
+                  <a:srgbClr val="5A6B78"/>
                 </a:solidFill>
                 <a:latin typeface="Calibri" panose="020F0502020204030204" pitchFamily="34" charset="0"/>
                 <a:ea typeface="Calibri" panose="020F0502020204030204" pitchFamily="34" charset="-122"/>
@@ -7967,102 +7573,20 @@
               </a:rPr>
               <a:t>Version range resolver</a:t>
             </a:r>
-            <a:endParaRPr lang="en-US" sz="950" dirty="0"/>
-          </a:p>
-        </p:txBody>
-      </p:sp>
-      <p:sp>
-        <p:nvSpPr>
-          <p:cNvPr id="12" name="Shape 10"/>
-          <p:cNvSpPr/>
-          <p:nvPr/>
-        </p:nvSpPr>
-        <p:spPr>
-          <a:xfrm>
-            <a:off x="822960" y="3145536"/>
-            <a:ext cx="841248" cy="237744"/>
-          </a:xfrm>
-          <a:prstGeom prst="roundRect">
-            <a:avLst>
-              <a:gd name="adj" fmla="val 15385"/>
-            </a:avLst>
-          </a:prstGeom>
-          <a:solidFill>
-            <a:srgbClr val="E4F4EF"/>
-          </a:solidFill>
-          <a:ln w="12700">
-            <a:solidFill>
-              <a:srgbClr val="E4F4EF"/>
-            </a:solidFill>
-            <a:prstDash val="solid"/>
-          </a:ln>
-        </p:spPr>
-      </p:sp>
-      <p:sp>
-        <p:nvSpPr>
-          <p:cNvPr id="13" name="Text 11"/>
-          <p:cNvSpPr/>
-          <p:nvPr/>
-        </p:nvSpPr>
-        <p:spPr>
-          <a:xfrm>
-            <a:off x="822960" y="3145536"/>
-            <a:ext cx="841248" cy="237744"/>
-          </a:xfrm>
-          <a:prstGeom prst="rect">
-            <a:avLst/>
-          </a:prstGeom>
-          <a:noFill/>
-        </p:spPr>
-        <p:txBody>
-          <a:bodyPr wrap="square" lIns="0" tIns="0" rIns="0" bIns="0" rtlCol="0" anchor="ctr"/>
-          <a:lstStyle/>
-          <a:p>
-            <a:pPr marL="0" indent="0" algn="ctr">
-              <a:buNone/>
-            </a:pPr>
-            <a:r>
-              <a:rPr lang="en-US" sz="850" b="1" kern="0" spc="80" dirty="0">
-                <a:solidFill>
-                  <a:srgbClr val="0B7A5A"/>
-                </a:solidFill>
-                <a:latin typeface="Calibri" panose="020F0502020204030204" pitchFamily="34" charset="0"/>
-                <a:ea typeface="Calibri" panose="020F0502020204030204" pitchFamily="34" charset="-122"/>
-                <a:cs typeface="Calibri" panose="020F0502020204030204" pitchFamily="34" charset="-120"/>
-              </a:rPr>
-              <a:t>BUILT</a:t>
-            </a:r>
-            <a:endParaRPr lang="en-US" sz="850" dirty="0"/>
-          </a:p>
-        </p:txBody>
-      </p:sp>
-      <p:sp>
-        <p:nvSpPr>
-          <p:cNvPr id="14" name="Text 12"/>
-          <p:cNvSpPr/>
-          <p:nvPr/>
-        </p:nvSpPr>
-        <p:spPr>
-          <a:xfrm>
-            <a:off x="822960" y="3419856"/>
-            <a:ext cx="2194560" cy="256032"/>
-          </a:xfrm>
-          <a:prstGeom prst="rect">
-            <a:avLst/>
-          </a:prstGeom>
-          <a:noFill/>
-        </p:spPr>
-        <p:txBody>
-          <a:bodyPr wrap="square" lIns="0" tIns="0" rIns="0" bIns="0" rtlCol="0" anchor="ctr"/>
-          <a:lstStyle/>
-          <a:p>
-            <a:pPr marL="0" indent="0">
-              <a:buNone/>
-            </a:pPr>
-            <a:r>
-              <a:rPr lang="en-US" sz="950" dirty="0">
-                <a:solidFill>
-                  <a:srgbClr val="1B2A33"/>
+            <a:endParaRPr lang="en-US" sz="1000" dirty="0"/>
+          </a:p>
+          <a:p>
+            <a:pPr marL="342900" indent="-342900">
+              <a:spcAft>
+                <a:spcPts val="600"/>
+              </a:spcAft>
+              <a:buSzPct val="100000"/>
+              <a:buChar char="•"/>
+            </a:pPr>
+            <a:r>
+              <a:rPr lang="en-US" sz="1000" dirty="0">
+                <a:solidFill>
+                  <a:srgbClr val="5A6B78"/>
                 </a:solidFill>
                 <a:latin typeface="Calibri" panose="020F0502020204030204" pitchFamily="34" charset="0"/>
                 <a:ea typeface="Calibri" panose="020F0502020204030204" pitchFamily="34" charset="-122"/>
@@ -8070,102 +7594,20 @@
               </a:rPr>
               <a:t>Safe archive unpacking</a:t>
             </a:r>
-            <a:endParaRPr lang="en-US" sz="950" dirty="0"/>
-          </a:p>
-        </p:txBody>
-      </p:sp>
-      <p:sp>
-        <p:nvSpPr>
-          <p:cNvPr id="15" name="Shape 13"/>
-          <p:cNvSpPr/>
-          <p:nvPr/>
-        </p:nvSpPr>
-        <p:spPr>
-          <a:xfrm>
-            <a:off x="822960" y="3657600"/>
-            <a:ext cx="841248" cy="237744"/>
-          </a:xfrm>
-          <a:prstGeom prst="roundRect">
-            <a:avLst>
-              <a:gd name="adj" fmla="val 15385"/>
-            </a:avLst>
-          </a:prstGeom>
-          <a:solidFill>
-            <a:srgbClr val="E4F4EF"/>
-          </a:solidFill>
-          <a:ln w="12700">
-            <a:solidFill>
-              <a:srgbClr val="E4F4EF"/>
-            </a:solidFill>
-            <a:prstDash val="solid"/>
-          </a:ln>
-        </p:spPr>
-      </p:sp>
-      <p:sp>
-        <p:nvSpPr>
-          <p:cNvPr id="16" name="Text 14"/>
-          <p:cNvSpPr/>
-          <p:nvPr/>
-        </p:nvSpPr>
-        <p:spPr>
-          <a:xfrm>
-            <a:off x="822960" y="3657600"/>
-            <a:ext cx="841248" cy="237744"/>
-          </a:xfrm>
-          <a:prstGeom prst="rect">
-            <a:avLst/>
-          </a:prstGeom>
-          <a:noFill/>
-        </p:spPr>
-        <p:txBody>
-          <a:bodyPr wrap="square" lIns="0" tIns="0" rIns="0" bIns="0" rtlCol="0" anchor="ctr"/>
-          <a:lstStyle/>
-          <a:p>
-            <a:pPr marL="0" indent="0" algn="ctr">
-              <a:buNone/>
-            </a:pPr>
-            <a:r>
-              <a:rPr lang="en-US" sz="850" b="1" kern="0" spc="80" dirty="0">
-                <a:solidFill>
-                  <a:srgbClr val="0B7A5A"/>
-                </a:solidFill>
-                <a:latin typeface="Calibri" panose="020F0502020204030204" pitchFamily="34" charset="0"/>
-                <a:ea typeface="Calibri" panose="020F0502020204030204" pitchFamily="34" charset="-122"/>
-                <a:cs typeface="Calibri" panose="020F0502020204030204" pitchFamily="34" charset="-120"/>
-              </a:rPr>
-              <a:t>BUILT</a:t>
-            </a:r>
-            <a:endParaRPr lang="en-US" sz="850" dirty="0"/>
-          </a:p>
-        </p:txBody>
-      </p:sp>
-      <p:sp>
-        <p:nvSpPr>
-          <p:cNvPr id="17" name="Text 15"/>
-          <p:cNvSpPr/>
-          <p:nvPr/>
-        </p:nvSpPr>
-        <p:spPr>
-          <a:xfrm>
-            <a:off x="822960" y="3931920"/>
-            <a:ext cx="2194560" cy="256032"/>
-          </a:xfrm>
-          <a:prstGeom prst="rect">
-            <a:avLst/>
-          </a:prstGeom>
-          <a:noFill/>
-        </p:spPr>
-        <p:txBody>
-          <a:bodyPr wrap="square" lIns="0" tIns="0" rIns="0" bIns="0" rtlCol="0" anchor="ctr"/>
-          <a:lstStyle/>
-          <a:p>
-            <a:pPr marL="0" indent="0">
-              <a:buNone/>
-            </a:pPr>
-            <a:r>
-              <a:rPr lang="en-US" sz="950" dirty="0">
-                <a:solidFill>
-                  <a:srgbClr val="1B2A33"/>
+            <a:endParaRPr lang="en-US" sz="1000" dirty="0"/>
+          </a:p>
+          <a:p>
+            <a:pPr marL="342900" indent="-342900">
+              <a:spcAft>
+                <a:spcPts val="600"/>
+              </a:spcAft>
+              <a:buSzPct val="100000"/>
+              <a:buChar char="•"/>
+            </a:pPr>
+            <a:r>
+              <a:rPr lang="en-US" sz="1000" dirty="0">
+                <a:solidFill>
+                  <a:srgbClr val="5A6B78"/>
                 </a:solidFill>
                 <a:latin typeface="Calibri" panose="020F0502020204030204" pitchFamily="34" charset="0"/>
                 <a:ea typeface="Calibri" panose="020F0502020204030204" pitchFamily="34" charset="-122"/>
@@ -8173,102 +7615,20 @@
               </a:rPr>
               <a:t>Manifest and lockfile reader</a:t>
             </a:r>
-            <a:endParaRPr lang="en-US" sz="950" dirty="0"/>
-          </a:p>
-        </p:txBody>
-      </p:sp>
-      <p:sp>
-        <p:nvSpPr>
-          <p:cNvPr id="18" name="Shape 16"/>
-          <p:cNvSpPr/>
-          <p:nvPr/>
-        </p:nvSpPr>
-        <p:spPr>
-          <a:xfrm>
-            <a:off x="822960" y="4169664"/>
-            <a:ext cx="841248" cy="237744"/>
-          </a:xfrm>
-          <a:prstGeom prst="roundRect">
-            <a:avLst>
-              <a:gd name="adj" fmla="val 15385"/>
-            </a:avLst>
-          </a:prstGeom>
-          <a:solidFill>
-            <a:srgbClr val="E4F4EF"/>
-          </a:solidFill>
-          <a:ln w="12700">
-            <a:solidFill>
-              <a:srgbClr val="E4F4EF"/>
-            </a:solidFill>
-            <a:prstDash val="solid"/>
-          </a:ln>
-        </p:spPr>
-      </p:sp>
-      <p:sp>
-        <p:nvSpPr>
-          <p:cNvPr id="19" name="Text 17"/>
-          <p:cNvSpPr/>
-          <p:nvPr/>
-        </p:nvSpPr>
-        <p:spPr>
-          <a:xfrm>
-            <a:off x="822960" y="4169664"/>
-            <a:ext cx="841248" cy="237744"/>
-          </a:xfrm>
-          <a:prstGeom prst="rect">
-            <a:avLst/>
-          </a:prstGeom>
-          <a:noFill/>
-        </p:spPr>
-        <p:txBody>
-          <a:bodyPr wrap="square" lIns="0" tIns="0" rIns="0" bIns="0" rtlCol="0" anchor="ctr"/>
-          <a:lstStyle/>
-          <a:p>
-            <a:pPr marL="0" indent="0" algn="ctr">
-              <a:buNone/>
-            </a:pPr>
-            <a:r>
-              <a:rPr lang="en-US" sz="850" b="1" kern="0" spc="80" dirty="0">
-                <a:solidFill>
-                  <a:srgbClr val="0B7A5A"/>
-                </a:solidFill>
-                <a:latin typeface="Calibri" panose="020F0502020204030204" pitchFamily="34" charset="0"/>
-                <a:ea typeface="Calibri" panose="020F0502020204030204" pitchFamily="34" charset="-122"/>
-                <a:cs typeface="Calibri" panose="020F0502020204030204" pitchFamily="34" charset="-120"/>
-              </a:rPr>
-              <a:t>BUILT</a:t>
-            </a:r>
-            <a:endParaRPr lang="en-US" sz="850" dirty="0"/>
-          </a:p>
-        </p:txBody>
-      </p:sp>
-      <p:sp>
-        <p:nvSpPr>
-          <p:cNvPr id="20" name="Text 18"/>
-          <p:cNvSpPr/>
-          <p:nvPr/>
-        </p:nvSpPr>
-        <p:spPr>
-          <a:xfrm>
-            <a:off x="822960" y="4443984"/>
-            <a:ext cx="2194560" cy="256032"/>
-          </a:xfrm>
-          <a:prstGeom prst="rect">
-            <a:avLst/>
-          </a:prstGeom>
-          <a:noFill/>
-        </p:spPr>
-        <p:txBody>
-          <a:bodyPr wrap="square" lIns="0" tIns="0" rIns="0" bIns="0" rtlCol="0" anchor="ctr"/>
-          <a:lstStyle/>
-          <a:p>
-            <a:pPr marL="0" indent="0">
-              <a:buNone/>
-            </a:pPr>
-            <a:r>
-              <a:rPr lang="en-US" sz="950" dirty="0">
-                <a:solidFill>
-                  <a:srgbClr val="1B2A33"/>
+            <a:endParaRPr lang="en-US" sz="1000" dirty="0"/>
+          </a:p>
+          <a:p>
+            <a:pPr marL="342900" indent="-342900">
+              <a:spcAft>
+                <a:spcPts val="600"/>
+              </a:spcAft>
+              <a:buSzPct val="100000"/>
+              <a:buChar char="•"/>
+            </a:pPr>
+            <a:r>
+              <a:rPr lang="en-US" sz="1000" dirty="0">
+                <a:solidFill>
+                  <a:srgbClr val="5A6B78"/>
                 </a:solidFill>
                 <a:latin typeface="Calibri" panose="020F0502020204030204" pitchFamily="34" charset="0"/>
                 <a:ea typeface="Calibri" panose="020F0502020204030204" pitchFamily="34" charset="-122"/>
@@ -8276,85 +7636,20 @@
               </a:rPr>
               <a:t>Dependency tree builder</a:t>
             </a:r>
-            <a:endParaRPr lang="en-US" sz="950" dirty="0"/>
-          </a:p>
-        </p:txBody>
-      </p:sp>
-      <p:sp>
-        <p:nvSpPr>
-          <p:cNvPr id="21" name="Shape 19"/>
-          <p:cNvSpPr/>
-          <p:nvPr/>
-        </p:nvSpPr>
-        <p:spPr>
-          <a:xfrm>
-            <a:off x="822960" y="4681728"/>
-            <a:ext cx="841248" cy="237744"/>
-          </a:xfrm>
-          <a:prstGeom prst="roundRect">
-            <a:avLst>
-              <a:gd name="adj" fmla="val 15385"/>
-            </a:avLst>
-          </a:prstGeom>
-          <a:solidFill>
-            <a:srgbClr val="E4F4EF"/>
-          </a:solidFill>
-          <a:ln w="12700">
-            <a:solidFill>
-              <a:srgbClr val="E4F4EF"/>
-            </a:solidFill>
-            <a:prstDash val="solid"/>
-          </a:ln>
-        </p:spPr>
-      </p:sp>
-      <p:sp>
-        <p:nvSpPr>
-          <p:cNvPr id="22" name="Text 20"/>
-          <p:cNvSpPr/>
-          <p:nvPr/>
-        </p:nvSpPr>
-        <p:spPr>
-          <a:xfrm>
-            <a:off x="822960" y="4681728"/>
-            <a:ext cx="841248" cy="237744"/>
-          </a:xfrm>
-          <a:prstGeom prst="rect">
-            <a:avLst/>
-          </a:prstGeom>
-          <a:noFill/>
-        </p:spPr>
-        <p:txBody>
-          <a:bodyPr wrap="square" lIns="0" tIns="0" rIns="0" bIns="0" rtlCol="0" anchor="ctr"/>
-          <a:lstStyle/>
-          <a:p>
-            <a:pPr marL="0" indent="0" algn="ctr">
-              <a:buNone/>
-            </a:pPr>
-            <a:r>
-              <a:rPr lang="en-US" sz="850" b="1" kern="0" spc="80" dirty="0">
-                <a:solidFill>
-                  <a:srgbClr val="0B7A5A"/>
-                </a:solidFill>
-                <a:latin typeface="Calibri" panose="020F0502020204030204" pitchFamily="34" charset="0"/>
-                <a:ea typeface="Calibri" panose="020F0502020204030204" pitchFamily="34" charset="-122"/>
-                <a:cs typeface="Calibri" panose="020F0502020204030204" pitchFamily="34" charset="-120"/>
-              </a:rPr>
-              <a:t>BUILT</a:t>
-            </a:r>
-            <a:endParaRPr lang="en-US" sz="850" dirty="0"/>
-          </a:p>
-        </p:txBody>
-      </p:sp>
-      <p:sp>
-        <p:nvSpPr>
-          <p:cNvPr id="23" name="Shape 21"/>
+            <a:endParaRPr lang="en-US" sz="1000" dirty="0"/>
+          </a:p>
+        </p:txBody>
+      </p:sp>
+      <p:sp>
+        <p:nvSpPr>
+          <p:cNvPr id="115" name="Shape 8"/>
           <p:cNvSpPr/>
           <p:nvPr/>
         </p:nvSpPr>
         <p:spPr>
           <a:xfrm>
             <a:off x="3392424" y="1691640"/>
-            <a:ext cx="2615184" cy="3931920"/>
+            <a:ext cx="2615184" cy="3977640"/>
           </a:xfrm>
           <a:prstGeom prst="roundRect">
             <a:avLst>
@@ -8374,14 +7669,33 @@
       </p:sp>
       <p:sp>
         <p:nvSpPr>
-          <p:cNvPr id="24" name="Text 22"/>
-          <p:cNvSpPr/>
-          <p:nvPr/>
-        </p:nvSpPr>
-        <p:spPr>
-          <a:xfrm>
-            <a:off x="3621024" y="1874520"/>
-            <a:ext cx="2194560" cy="457200"/>
+          <p:cNvPr id="116" name="Shape 9"/>
+          <p:cNvSpPr/>
+          <p:nvPr/>
+        </p:nvSpPr>
+        <p:spPr>
+          <a:xfrm>
+            <a:off x="3621024" y="1901952"/>
+            <a:ext cx="256032" cy="256032"/>
+          </a:xfrm>
+          <a:prstGeom prst="rect">
+            <a:avLst/>
+          </a:prstGeom>
+          <a:solidFill>
+            <a:srgbClr val="0B7A5A"/>
+          </a:solidFill>
+        </p:spPr>
+      </p:sp>
+      <p:sp>
+        <p:nvSpPr>
+          <p:cNvPr id="117" name="Text 10"/>
+          <p:cNvSpPr/>
+          <p:nvPr/>
+        </p:nvSpPr>
+        <p:spPr>
+          <a:xfrm>
+            <a:off x="3621024" y="2240280"/>
+            <a:ext cx="2194560" cy="502920"/>
           </a:xfrm>
           <a:prstGeom prst="rect">
             <a:avLst/>
@@ -8412,31 +7726,35 @@
       </p:sp>
       <p:sp>
         <p:nvSpPr>
-          <p:cNvPr id="25" name="Text 23"/>
-          <p:cNvSpPr/>
-          <p:nvPr/>
-        </p:nvSpPr>
-        <p:spPr>
-          <a:xfrm>
-            <a:off x="3621024" y="2395728"/>
-            <a:ext cx="2194560" cy="256032"/>
-          </a:xfrm>
-          <a:prstGeom prst="rect">
-            <a:avLst/>
-          </a:prstGeom>
-          <a:noFill/>
-        </p:spPr>
-        <p:txBody>
-          <a:bodyPr wrap="square" lIns="0" tIns="0" rIns="0" bIns="0" rtlCol="0" anchor="ctr"/>
-          <a:lstStyle/>
-          <a:p>
-            <a:pPr marL="0" indent="0">
-              <a:buNone/>
-            </a:pPr>
-            <a:r>
-              <a:rPr lang="en-US" sz="950" dirty="0">
-                <a:solidFill>
-                  <a:srgbClr val="1B2A33"/>
+          <p:cNvPr id="118" name="Text 11"/>
+          <p:cNvSpPr/>
+          <p:nvPr/>
+        </p:nvSpPr>
+        <p:spPr>
+          <a:xfrm>
+            <a:off x="3621024" y="2761488"/>
+            <a:ext cx="2194560" cy="2743200"/>
+          </a:xfrm>
+          <a:prstGeom prst="rect">
+            <a:avLst/>
+          </a:prstGeom>
+          <a:noFill/>
+        </p:spPr>
+        <p:txBody>
+          <a:bodyPr wrap="square" lIns="0" tIns="0" rIns="0" bIns="0" rtlCol="0" anchor="ctr"/>
+          <a:lstStyle/>
+          <a:p>
+            <a:pPr marL="342900" indent="-342900">
+              <a:spcAft>
+                <a:spcPts val="600"/>
+              </a:spcAft>
+              <a:buSzPct val="100000"/>
+              <a:buChar char="•"/>
+            </a:pPr>
+            <a:r>
+              <a:rPr lang="en-US" sz="1000" dirty="0">
+                <a:solidFill>
+                  <a:srgbClr val="5A6B78"/>
                 </a:solidFill>
                 <a:latin typeface="Calibri" panose="020F0502020204030204" pitchFamily="34" charset="0"/>
                 <a:ea typeface="Calibri" panose="020F0502020204030204" pitchFamily="34" charset="-122"/>
@@ -8444,102 +7762,20 @@
               </a:rPr>
               <a:t>Python parser</a:t>
             </a:r>
-            <a:endParaRPr lang="en-US" sz="950" dirty="0"/>
-          </a:p>
-        </p:txBody>
-      </p:sp>
-      <p:sp>
-        <p:nvSpPr>
-          <p:cNvPr id="26" name="Shape 24"/>
-          <p:cNvSpPr/>
-          <p:nvPr/>
-        </p:nvSpPr>
-        <p:spPr>
-          <a:xfrm>
-            <a:off x="3621024" y="2633472"/>
-            <a:ext cx="841248" cy="237744"/>
-          </a:xfrm>
-          <a:prstGeom prst="roundRect">
-            <a:avLst>
-              <a:gd name="adj" fmla="val 15385"/>
-            </a:avLst>
-          </a:prstGeom>
-          <a:solidFill>
-            <a:srgbClr val="E4F4EF"/>
-          </a:solidFill>
-          <a:ln w="12700">
-            <a:solidFill>
-              <a:srgbClr val="E4F4EF"/>
-            </a:solidFill>
-            <a:prstDash val="solid"/>
-          </a:ln>
-        </p:spPr>
-      </p:sp>
-      <p:sp>
-        <p:nvSpPr>
-          <p:cNvPr id="27" name="Text 25"/>
-          <p:cNvSpPr/>
-          <p:nvPr/>
-        </p:nvSpPr>
-        <p:spPr>
-          <a:xfrm>
-            <a:off x="3621024" y="2633472"/>
-            <a:ext cx="841248" cy="237744"/>
-          </a:xfrm>
-          <a:prstGeom prst="rect">
-            <a:avLst/>
-          </a:prstGeom>
-          <a:noFill/>
-        </p:spPr>
-        <p:txBody>
-          <a:bodyPr wrap="square" lIns="0" tIns="0" rIns="0" bIns="0" rtlCol="0" anchor="ctr"/>
-          <a:lstStyle/>
-          <a:p>
-            <a:pPr marL="0" indent="0" algn="ctr">
-              <a:buNone/>
-            </a:pPr>
-            <a:r>
-              <a:rPr lang="en-US" sz="850" b="1" kern="0" spc="80" dirty="0">
-                <a:solidFill>
-                  <a:srgbClr val="0B7A5A"/>
-                </a:solidFill>
-                <a:latin typeface="Calibri" panose="020F0502020204030204" pitchFamily="34" charset="0"/>
-                <a:ea typeface="Calibri" panose="020F0502020204030204" pitchFamily="34" charset="-122"/>
-                <a:cs typeface="Calibri" panose="020F0502020204030204" pitchFamily="34" charset="-120"/>
-              </a:rPr>
-              <a:t>BUILT</a:t>
-            </a:r>
-            <a:endParaRPr lang="en-US" sz="850" dirty="0"/>
-          </a:p>
-        </p:txBody>
-      </p:sp>
-      <p:sp>
-        <p:nvSpPr>
-          <p:cNvPr id="28" name="Text 26"/>
-          <p:cNvSpPr/>
-          <p:nvPr/>
-        </p:nvSpPr>
-        <p:spPr>
-          <a:xfrm>
-            <a:off x="3621024" y="2907792"/>
-            <a:ext cx="2194560" cy="256032"/>
-          </a:xfrm>
-          <a:prstGeom prst="rect">
-            <a:avLst/>
-          </a:prstGeom>
-          <a:noFill/>
-        </p:spPr>
-        <p:txBody>
-          <a:bodyPr wrap="square" lIns="0" tIns="0" rIns="0" bIns="0" rtlCol="0" anchor="ctr"/>
-          <a:lstStyle/>
-          <a:p>
-            <a:pPr marL="0" indent="0">
-              <a:buNone/>
-            </a:pPr>
-            <a:r>
-              <a:rPr lang="en-US" sz="950" dirty="0">
-                <a:solidFill>
-                  <a:srgbClr val="1B2A33"/>
+            <a:endParaRPr lang="en-US" sz="1000" dirty="0"/>
+          </a:p>
+          <a:p>
+            <a:pPr marL="342900" indent="-342900">
+              <a:spcAft>
+                <a:spcPts val="600"/>
+              </a:spcAft>
+              <a:buSzPct val="100000"/>
+              <a:buChar char="•"/>
+            </a:pPr>
+            <a:r>
+              <a:rPr lang="en-US" sz="1000" dirty="0">
+                <a:solidFill>
+                  <a:srgbClr val="5A6B78"/>
                 </a:solidFill>
                 <a:latin typeface="Calibri" panose="020F0502020204030204" pitchFamily="34" charset="0"/>
                 <a:ea typeface="Calibri" panose="020F0502020204030204" pitchFamily="34" charset="-122"/>
@@ -8547,102 +7783,20 @@
               </a:rPr>
               <a:t>JavaScript parser</a:t>
             </a:r>
-            <a:endParaRPr lang="en-US" sz="950" dirty="0"/>
-          </a:p>
-        </p:txBody>
-      </p:sp>
-      <p:sp>
-        <p:nvSpPr>
-          <p:cNvPr id="29" name="Shape 27"/>
-          <p:cNvSpPr/>
-          <p:nvPr/>
-        </p:nvSpPr>
-        <p:spPr>
-          <a:xfrm>
-            <a:off x="3621024" y="3145536"/>
-            <a:ext cx="841248" cy="237744"/>
-          </a:xfrm>
-          <a:prstGeom prst="roundRect">
-            <a:avLst>
-              <a:gd name="adj" fmla="val 15385"/>
-            </a:avLst>
-          </a:prstGeom>
-          <a:solidFill>
-            <a:srgbClr val="FBF2DF"/>
-          </a:solidFill>
-          <a:ln w="12700">
-            <a:solidFill>
-              <a:srgbClr val="FBF2DF"/>
-            </a:solidFill>
-            <a:prstDash val="solid"/>
-          </a:ln>
-        </p:spPr>
-      </p:sp>
-      <p:sp>
-        <p:nvSpPr>
-          <p:cNvPr id="30" name="Text 28"/>
-          <p:cNvSpPr/>
-          <p:nvPr/>
-        </p:nvSpPr>
-        <p:spPr>
-          <a:xfrm>
-            <a:off x="3621024" y="3145536"/>
-            <a:ext cx="841248" cy="237744"/>
-          </a:xfrm>
-          <a:prstGeom prst="rect">
-            <a:avLst/>
-          </a:prstGeom>
-          <a:noFill/>
-        </p:spPr>
-        <p:txBody>
-          <a:bodyPr wrap="square" lIns="0" tIns="0" rIns="0" bIns="0" rtlCol="0" anchor="ctr"/>
-          <a:lstStyle/>
-          <a:p>
-            <a:pPr marL="0" indent="0" algn="ctr">
-              <a:buNone/>
-            </a:pPr>
-            <a:r>
-              <a:rPr lang="en-US" sz="850" b="1" kern="0" spc="80" dirty="0">
-                <a:solidFill>
-                  <a:srgbClr val="C88A1E"/>
-                </a:solidFill>
-                <a:latin typeface="Calibri" panose="020F0502020204030204" pitchFamily="34" charset="0"/>
-                <a:ea typeface="Calibri" panose="020F0502020204030204" pitchFamily="34" charset="-122"/>
-                <a:cs typeface="Calibri" panose="020F0502020204030204" pitchFamily="34" charset="-120"/>
-              </a:rPr>
-              <a:t>IN PROGRESS</a:t>
-            </a:r>
-            <a:endParaRPr lang="en-US" sz="850" dirty="0"/>
-          </a:p>
-        </p:txBody>
-      </p:sp>
-      <p:sp>
-        <p:nvSpPr>
-          <p:cNvPr id="31" name="Text 29"/>
-          <p:cNvSpPr/>
-          <p:nvPr/>
-        </p:nvSpPr>
-        <p:spPr>
-          <a:xfrm>
-            <a:off x="3621024" y="3419856"/>
-            <a:ext cx="2194560" cy="256032"/>
-          </a:xfrm>
-          <a:prstGeom prst="rect">
-            <a:avLst/>
-          </a:prstGeom>
-          <a:noFill/>
-        </p:spPr>
-        <p:txBody>
-          <a:bodyPr wrap="square" lIns="0" tIns="0" rIns="0" bIns="0" rtlCol="0" anchor="ctr"/>
-          <a:lstStyle/>
-          <a:p>
-            <a:pPr marL="0" indent="0">
-              <a:buNone/>
-            </a:pPr>
-            <a:r>
-              <a:rPr lang="en-US" sz="950" dirty="0">
-                <a:solidFill>
-                  <a:srgbClr val="1B2A33"/>
+            <a:endParaRPr lang="en-US" sz="1000" dirty="0"/>
+          </a:p>
+          <a:p>
+            <a:pPr marL="342900" indent="-342900">
+              <a:spcAft>
+                <a:spcPts val="600"/>
+              </a:spcAft>
+              <a:buSzPct val="100000"/>
+              <a:buChar char="•"/>
+            </a:pPr>
+            <a:r>
+              <a:rPr lang="en-US" sz="1000" dirty="0">
+                <a:solidFill>
+                  <a:srgbClr val="5A6B78"/>
                 </a:solidFill>
                 <a:latin typeface="Calibri" panose="020F0502020204030204" pitchFamily="34" charset="0"/>
                 <a:ea typeface="Calibri" panose="020F0502020204030204" pitchFamily="34" charset="-122"/>
@@ -8650,102 +7804,20 @@
               </a:rPr>
               <a:t>Install script analyser</a:t>
             </a:r>
-            <a:endParaRPr lang="en-US" sz="950" dirty="0"/>
-          </a:p>
-        </p:txBody>
-      </p:sp>
-      <p:sp>
-        <p:nvSpPr>
-          <p:cNvPr id="32" name="Shape 30"/>
-          <p:cNvSpPr/>
-          <p:nvPr/>
-        </p:nvSpPr>
-        <p:spPr>
-          <a:xfrm>
-            <a:off x="3621024" y="3657600"/>
-            <a:ext cx="841248" cy="237744"/>
-          </a:xfrm>
-          <a:prstGeom prst="roundRect">
-            <a:avLst>
-              <a:gd name="adj" fmla="val 15385"/>
-            </a:avLst>
-          </a:prstGeom>
-          <a:solidFill>
-            <a:srgbClr val="E4F4EF"/>
-          </a:solidFill>
-          <a:ln w="12700">
-            <a:solidFill>
-              <a:srgbClr val="E4F4EF"/>
-            </a:solidFill>
-            <a:prstDash val="solid"/>
-          </a:ln>
-        </p:spPr>
-      </p:sp>
-      <p:sp>
-        <p:nvSpPr>
-          <p:cNvPr id="33" name="Text 31"/>
-          <p:cNvSpPr/>
-          <p:nvPr/>
-        </p:nvSpPr>
-        <p:spPr>
-          <a:xfrm>
-            <a:off x="3621024" y="3657600"/>
-            <a:ext cx="841248" cy="237744"/>
-          </a:xfrm>
-          <a:prstGeom prst="rect">
-            <a:avLst/>
-          </a:prstGeom>
-          <a:noFill/>
-        </p:spPr>
-        <p:txBody>
-          <a:bodyPr wrap="square" lIns="0" tIns="0" rIns="0" bIns="0" rtlCol="0" anchor="ctr"/>
-          <a:lstStyle/>
-          <a:p>
-            <a:pPr marL="0" indent="0" algn="ctr">
-              <a:buNone/>
-            </a:pPr>
-            <a:r>
-              <a:rPr lang="en-US" sz="850" b="1" kern="0" spc="80" dirty="0">
-                <a:solidFill>
-                  <a:srgbClr val="0B7A5A"/>
-                </a:solidFill>
-                <a:latin typeface="Calibri" panose="020F0502020204030204" pitchFamily="34" charset="0"/>
-                <a:ea typeface="Calibri" panose="020F0502020204030204" pitchFamily="34" charset="-122"/>
-                <a:cs typeface="Calibri" panose="020F0502020204030204" pitchFamily="34" charset="-120"/>
-              </a:rPr>
-              <a:t>BUILT</a:t>
-            </a:r>
-            <a:endParaRPr lang="en-US" sz="850" dirty="0"/>
-          </a:p>
-        </p:txBody>
-      </p:sp>
-      <p:sp>
-        <p:nvSpPr>
-          <p:cNvPr id="34" name="Text 32"/>
-          <p:cNvSpPr/>
-          <p:nvPr/>
-        </p:nvSpPr>
-        <p:spPr>
-          <a:xfrm>
-            <a:off x="3621024" y="3931920"/>
-            <a:ext cx="2194560" cy="256032"/>
-          </a:xfrm>
-          <a:prstGeom prst="rect">
-            <a:avLst/>
-          </a:prstGeom>
-          <a:noFill/>
-        </p:spPr>
-        <p:txBody>
-          <a:bodyPr wrap="square" lIns="0" tIns="0" rIns="0" bIns="0" rtlCol="0" anchor="ctr"/>
-          <a:lstStyle/>
-          <a:p>
-            <a:pPr marL="0" indent="0">
-              <a:buNone/>
-            </a:pPr>
-            <a:r>
-              <a:rPr lang="en-US" sz="950" dirty="0">
-                <a:solidFill>
-                  <a:srgbClr val="1B2A33"/>
+            <a:endParaRPr lang="en-US" sz="1000" dirty="0"/>
+          </a:p>
+          <a:p>
+            <a:pPr marL="342900" indent="-342900">
+              <a:spcAft>
+                <a:spcPts val="600"/>
+              </a:spcAft>
+              <a:buSzPct val="100000"/>
+              <a:buChar char="•"/>
+            </a:pPr>
+            <a:r>
+              <a:rPr lang="en-US" sz="1000" dirty="0">
+                <a:solidFill>
+                  <a:srgbClr val="5A6B78"/>
                 </a:solidFill>
                 <a:latin typeface="Calibri" panose="020F0502020204030204" pitchFamily="34" charset="0"/>
                 <a:ea typeface="Calibri" panose="020F0502020204030204" pitchFamily="34" charset="-122"/>
@@ -8753,102 +7825,20 @@
               </a:rPr>
               <a:t>Typosquat checker</a:t>
             </a:r>
-            <a:endParaRPr lang="en-US" sz="950" dirty="0"/>
-          </a:p>
-        </p:txBody>
-      </p:sp>
-      <p:sp>
-        <p:nvSpPr>
-          <p:cNvPr id="35" name="Shape 33"/>
-          <p:cNvSpPr/>
-          <p:nvPr/>
-        </p:nvSpPr>
-        <p:spPr>
-          <a:xfrm>
-            <a:off x="3621024" y="4169664"/>
-            <a:ext cx="841248" cy="237744"/>
-          </a:xfrm>
-          <a:prstGeom prst="roundRect">
-            <a:avLst>
-              <a:gd name="adj" fmla="val 15385"/>
-            </a:avLst>
-          </a:prstGeom>
-          <a:solidFill>
-            <a:srgbClr val="E4F4EF"/>
-          </a:solidFill>
-          <a:ln w="12700">
-            <a:solidFill>
-              <a:srgbClr val="E4F4EF"/>
-            </a:solidFill>
-            <a:prstDash val="solid"/>
-          </a:ln>
-        </p:spPr>
-      </p:sp>
-      <p:sp>
-        <p:nvSpPr>
-          <p:cNvPr id="36" name="Text 34"/>
-          <p:cNvSpPr/>
-          <p:nvPr/>
-        </p:nvSpPr>
-        <p:spPr>
-          <a:xfrm>
-            <a:off x="3621024" y="4169664"/>
-            <a:ext cx="841248" cy="237744"/>
-          </a:xfrm>
-          <a:prstGeom prst="rect">
-            <a:avLst/>
-          </a:prstGeom>
-          <a:noFill/>
-        </p:spPr>
-        <p:txBody>
-          <a:bodyPr wrap="square" lIns="0" tIns="0" rIns="0" bIns="0" rtlCol="0" anchor="ctr"/>
-          <a:lstStyle/>
-          <a:p>
-            <a:pPr marL="0" indent="0" algn="ctr">
-              <a:buNone/>
-            </a:pPr>
-            <a:r>
-              <a:rPr lang="en-US" sz="850" b="1" kern="0" spc="80" dirty="0">
-                <a:solidFill>
-                  <a:srgbClr val="0B7A5A"/>
-                </a:solidFill>
-                <a:latin typeface="Calibri" panose="020F0502020204030204" pitchFamily="34" charset="0"/>
-                <a:ea typeface="Calibri" panose="020F0502020204030204" pitchFamily="34" charset="-122"/>
-                <a:cs typeface="Calibri" panose="020F0502020204030204" pitchFamily="34" charset="-120"/>
-              </a:rPr>
-              <a:t>BUILT</a:t>
-            </a:r>
-            <a:endParaRPr lang="en-US" sz="850" dirty="0"/>
-          </a:p>
-        </p:txBody>
-      </p:sp>
-      <p:sp>
-        <p:nvSpPr>
-          <p:cNvPr id="37" name="Text 35"/>
-          <p:cNvSpPr/>
-          <p:nvPr/>
-        </p:nvSpPr>
-        <p:spPr>
-          <a:xfrm>
-            <a:off x="3621024" y="4443984"/>
-            <a:ext cx="2194560" cy="256032"/>
-          </a:xfrm>
-          <a:prstGeom prst="rect">
-            <a:avLst/>
-          </a:prstGeom>
-          <a:noFill/>
-        </p:spPr>
-        <p:txBody>
-          <a:bodyPr wrap="square" lIns="0" tIns="0" rIns="0" bIns="0" rtlCol="0" anchor="ctr"/>
-          <a:lstStyle/>
-          <a:p>
-            <a:pPr marL="0" indent="0">
-              <a:buNone/>
-            </a:pPr>
-            <a:r>
-              <a:rPr lang="en-US" sz="950" dirty="0">
-                <a:solidFill>
-                  <a:srgbClr val="1B2A33"/>
+            <a:endParaRPr lang="en-US" sz="1000" dirty="0"/>
+          </a:p>
+          <a:p>
+            <a:pPr marL="342900" indent="-342900">
+              <a:spcAft>
+                <a:spcPts val="600"/>
+              </a:spcAft>
+              <a:buSzPct val="100000"/>
+              <a:buChar char="•"/>
+            </a:pPr>
+            <a:r>
+              <a:rPr lang="en-US" sz="1000" dirty="0">
+                <a:solidFill>
+                  <a:srgbClr val="5A6B78"/>
                 </a:solidFill>
                 <a:latin typeface="Calibri" panose="020F0502020204030204" pitchFamily="34" charset="0"/>
                 <a:ea typeface="Calibri" panose="020F0502020204030204" pitchFamily="34" charset="-122"/>
@@ -8856,102 +7846,20 @@
               </a:rPr>
               <a:t>Feature builder</a:t>
             </a:r>
-            <a:endParaRPr lang="en-US" sz="950" dirty="0"/>
-          </a:p>
-        </p:txBody>
-      </p:sp>
-      <p:sp>
-        <p:nvSpPr>
-          <p:cNvPr id="38" name="Shape 36"/>
-          <p:cNvSpPr/>
-          <p:nvPr/>
-        </p:nvSpPr>
-        <p:spPr>
-          <a:xfrm>
-            <a:off x="3621024" y="4681728"/>
-            <a:ext cx="841248" cy="237744"/>
-          </a:xfrm>
-          <a:prstGeom prst="roundRect">
-            <a:avLst>
-              <a:gd name="adj" fmla="val 15385"/>
-            </a:avLst>
-          </a:prstGeom>
-          <a:solidFill>
-            <a:srgbClr val="FBF2DF"/>
-          </a:solidFill>
-          <a:ln w="12700">
-            <a:solidFill>
-              <a:srgbClr val="FBF2DF"/>
-            </a:solidFill>
-            <a:prstDash val="solid"/>
-          </a:ln>
-        </p:spPr>
-      </p:sp>
-      <p:sp>
-        <p:nvSpPr>
-          <p:cNvPr id="39" name="Text 37"/>
-          <p:cNvSpPr/>
-          <p:nvPr/>
-        </p:nvSpPr>
-        <p:spPr>
-          <a:xfrm>
-            <a:off x="3621024" y="4681728"/>
-            <a:ext cx="841248" cy="237744"/>
-          </a:xfrm>
-          <a:prstGeom prst="rect">
-            <a:avLst/>
-          </a:prstGeom>
-          <a:noFill/>
-        </p:spPr>
-        <p:txBody>
-          <a:bodyPr wrap="square" lIns="0" tIns="0" rIns="0" bIns="0" rtlCol="0" anchor="ctr"/>
-          <a:lstStyle/>
-          <a:p>
-            <a:pPr marL="0" indent="0" algn="ctr">
-              <a:buNone/>
-            </a:pPr>
-            <a:r>
-              <a:rPr lang="en-US" sz="850" b="1" kern="0" spc="80" dirty="0">
-                <a:solidFill>
-                  <a:srgbClr val="C88A1E"/>
-                </a:solidFill>
-                <a:latin typeface="Calibri" panose="020F0502020204030204" pitchFamily="34" charset="0"/>
-                <a:ea typeface="Calibri" panose="020F0502020204030204" pitchFamily="34" charset="-122"/>
-                <a:cs typeface="Calibri" panose="020F0502020204030204" pitchFamily="34" charset="-120"/>
-              </a:rPr>
-              <a:t>IN PROGRESS</a:t>
-            </a:r>
-            <a:endParaRPr lang="en-US" sz="850" dirty="0"/>
-          </a:p>
-        </p:txBody>
-      </p:sp>
-      <p:sp>
-        <p:nvSpPr>
-          <p:cNvPr id="40" name="Text 38"/>
-          <p:cNvSpPr/>
-          <p:nvPr/>
-        </p:nvSpPr>
-        <p:spPr>
-          <a:xfrm>
-            <a:off x="3621024" y="4956048"/>
-            <a:ext cx="2194560" cy="256032"/>
-          </a:xfrm>
-          <a:prstGeom prst="rect">
-            <a:avLst/>
-          </a:prstGeom>
-          <a:noFill/>
-        </p:spPr>
-        <p:txBody>
-          <a:bodyPr wrap="square" lIns="0" tIns="0" rIns="0" bIns="0" rtlCol="0" anchor="ctr"/>
-          <a:lstStyle/>
-          <a:p>
-            <a:pPr marL="0" indent="0">
-              <a:buNone/>
-            </a:pPr>
-            <a:r>
-              <a:rPr lang="en-US" sz="950" dirty="0">
-                <a:solidFill>
-                  <a:srgbClr val="1B2A33"/>
+            <a:endParaRPr lang="en-US" sz="1000" dirty="0"/>
+          </a:p>
+          <a:p>
+            <a:pPr marL="342900" indent="-342900">
+              <a:spcAft>
+                <a:spcPts val="600"/>
+              </a:spcAft>
+              <a:buSzPct val="100000"/>
+              <a:buChar char="•"/>
+            </a:pPr>
+            <a:r>
+              <a:rPr lang="en-US" sz="1000" dirty="0">
+                <a:solidFill>
+                  <a:srgbClr val="5A6B78"/>
                 </a:solidFill>
                 <a:latin typeface="Calibri" panose="020F0502020204030204" pitchFamily="34" charset="0"/>
                 <a:ea typeface="Calibri" panose="020F0502020204030204" pitchFamily="34" charset="-122"/>
@@ -8959,85 +7867,20 @@
               </a:rPr>
               <a:t>Analysis coordinator</a:t>
             </a:r>
-            <a:endParaRPr lang="en-US" sz="950" dirty="0"/>
-          </a:p>
-        </p:txBody>
-      </p:sp>
-      <p:sp>
-        <p:nvSpPr>
-          <p:cNvPr id="41" name="Shape 39"/>
-          <p:cNvSpPr/>
-          <p:nvPr/>
-        </p:nvSpPr>
-        <p:spPr>
-          <a:xfrm>
-            <a:off x="3621024" y="5193792"/>
-            <a:ext cx="841248" cy="237744"/>
-          </a:xfrm>
-          <a:prstGeom prst="roundRect">
-            <a:avLst>
-              <a:gd name="adj" fmla="val 15385"/>
-            </a:avLst>
-          </a:prstGeom>
-          <a:solidFill>
-            <a:srgbClr val="E4F4EF"/>
-          </a:solidFill>
-          <a:ln w="12700">
-            <a:solidFill>
-              <a:srgbClr val="E4F4EF"/>
-            </a:solidFill>
-            <a:prstDash val="solid"/>
-          </a:ln>
-        </p:spPr>
-      </p:sp>
-      <p:sp>
-        <p:nvSpPr>
-          <p:cNvPr id="42" name="Text 40"/>
-          <p:cNvSpPr/>
-          <p:nvPr/>
-        </p:nvSpPr>
-        <p:spPr>
-          <a:xfrm>
-            <a:off x="3621024" y="5193792"/>
-            <a:ext cx="841248" cy="237744"/>
-          </a:xfrm>
-          <a:prstGeom prst="rect">
-            <a:avLst/>
-          </a:prstGeom>
-          <a:noFill/>
-        </p:spPr>
-        <p:txBody>
-          <a:bodyPr wrap="square" lIns="0" tIns="0" rIns="0" bIns="0" rtlCol="0" anchor="ctr"/>
-          <a:lstStyle/>
-          <a:p>
-            <a:pPr marL="0" indent="0" algn="ctr">
-              <a:buNone/>
-            </a:pPr>
-            <a:r>
-              <a:rPr lang="en-US" sz="850" b="1" kern="0" spc="80" dirty="0">
-                <a:solidFill>
-                  <a:srgbClr val="0B7A5A"/>
-                </a:solidFill>
-                <a:latin typeface="Calibri" panose="020F0502020204030204" pitchFamily="34" charset="0"/>
-                <a:ea typeface="Calibri" panose="020F0502020204030204" pitchFamily="34" charset="-122"/>
-                <a:cs typeface="Calibri" panose="020F0502020204030204" pitchFamily="34" charset="-120"/>
-              </a:rPr>
-              <a:t>BUILT</a:t>
-            </a:r>
-            <a:endParaRPr lang="en-US" sz="850" dirty="0"/>
-          </a:p>
-        </p:txBody>
-      </p:sp>
-      <p:sp>
-        <p:nvSpPr>
-          <p:cNvPr id="43" name="Shape 41"/>
+            <a:endParaRPr lang="en-US" sz="1000" dirty="0"/>
+          </a:p>
+        </p:txBody>
+      </p:sp>
+      <p:sp>
+        <p:nvSpPr>
+          <p:cNvPr id="119" name="Shape 12"/>
           <p:cNvSpPr/>
           <p:nvPr/>
         </p:nvSpPr>
         <p:spPr>
           <a:xfrm>
             <a:off x="6190488" y="1691640"/>
-            <a:ext cx="2615184" cy="3931920"/>
+            <a:ext cx="2615184" cy="3977640"/>
           </a:xfrm>
           <a:prstGeom prst="roundRect">
             <a:avLst>
@@ -9057,14 +7900,33 @@
       </p:sp>
       <p:sp>
         <p:nvSpPr>
-          <p:cNvPr id="44" name="Text 42"/>
-          <p:cNvSpPr/>
-          <p:nvPr/>
-        </p:nvSpPr>
-        <p:spPr>
-          <a:xfrm>
-            <a:off x="6419088" y="1874520"/>
-            <a:ext cx="2194560" cy="457200"/>
+          <p:cNvPr id="120" name="Shape 13"/>
+          <p:cNvSpPr/>
+          <p:nvPr/>
+        </p:nvSpPr>
+        <p:spPr>
+          <a:xfrm>
+            <a:off x="6419088" y="1901952"/>
+            <a:ext cx="256032" cy="256032"/>
+          </a:xfrm>
+          <a:prstGeom prst="rect">
+            <a:avLst/>
+          </a:prstGeom>
+          <a:solidFill>
+            <a:srgbClr val="0B7A5A"/>
+          </a:solidFill>
+        </p:spPr>
+      </p:sp>
+      <p:sp>
+        <p:nvSpPr>
+          <p:cNvPr id="121" name="Text 14"/>
+          <p:cNvSpPr/>
+          <p:nvPr/>
+        </p:nvSpPr>
+        <p:spPr>
+          <a:xfrm>
+            <a:off x="6419088" y="2240280"/>
+            <a:ext cx="2194560" cy="502920"/>
           </a:xfrm>
           <a:prstGeom prst="rect">
             <a:avLst/>
@@ -9095,134 +7957,56 @@
       </p:sp>
       <p:sp>
         <p:nvSpPr>
-          <p:cNvPr id="45" name="Text 43"/>
-          <p:cNvSpPr/>
-          <p:nvPr/>
-        </p:nvSpPr>
-        <p:spPr>
-          <a:xfrm>
-            <a:off x="6419088" y="2395728"/>
-            <a:ext cx="2194560" cy="256032"/>
-          </a:xfrm>
-          <a:prstGeom prst="rect">
-            <a:avLst/>
-          </a:prstGeom>
-          <a:noFill/>
-        </p:spPr>
-        <p:txBody>
-          <a:bodyPr wrap="square" lIns="0" tIns="0" rIns="0" bIns="0" rtlCol="0" anchor="ctr"/>
-          <a:lstStyle/>
-          <a:p>
-            <a:pPr marL="0" indent="0">
-              <a:buNone/>
-            </a:pPr>
-            <a:r>
-              <a:rPr lang="en-US" sz="950" dirty="0">
-                <a:solidFill>
-                  <a:srgbClr val="1B2A33"/>
-                </a:solidFill>
-                <a:latin typeface="Calibri" panose="020F0502020204030204" pitchFamily="34" charset="0"/>
-                <a:ea typeface="Calibri" panose="020F0502020204030204" pitchFamily="34" charset="-122"/>
-                <a:cs typeface="Calibri" panose="020F0502020204030204" pitchFamily="34" charset="-120"/>
-              </a:rPr>
-              <a:t>Dataset builder</a:t>
-            </a:r>
-            <a:endParaRPr lang="en-US" sz="950" dirty="0"/>
-          </a:p>
-        </p:txBody>
-      </p:sp>
-      <p:sp>
-        <p:nvSpPr>
-          <p:cNvPr id="46" name="Shape 44"/>
-          <p:cNvSpPr/>
-          <p:nvPr/>
-        </p:nvSpPr>
-        <p:spPr>
-          <a:xfrm>
-            <a:off x="6419088" y="2633472"/>
-            <a:ext cx="841248" cy="237744"/>
-          </a:xfrm>
-          <a:prstGeom prst="roundRect">
-            <a:avLst>
-              <a:gd name="adj" fmla="val 15385"/>
-            </a:avLst>
-          </a:prstGeom>
-          <a:solidFill>
-            <a:srgbClr val="E4F4EF"/>
-          </a:solidFill>
-          <a:ln w="12700">
-            <a:solidFill>
-              <a:srgbClr val="E4F4EF"/>
-            </a:solidFill>
-            <a:prstDash val="solid"/>
-          </a:ln>
-        </p:spPr>
-      </p:sp>
-      <p:sp>
-        <p:nvSpPr>
-          <p:cNvPr id="47" name="Text 45"/>
-          <p:cNvSpPr/>
-          <p:nvPr/>
-        </p:nvSpPr>
-        <p:spPr>
-          <a:xfrm>
-            <a:off x="6419088" y="2633472"/>
-            <a:ext cx="841248" cy="237744"/>
-          </a:xfrm>
-          <a:prstGeom prst="rect">
-            <a:avLst/>
-          </a:prstGeom>
-          <a:noFill/>
-        </p:spPr>
-        <p:txBody>
-          <a:bodyPr wrap="square" lIns="0" tIns="0" rIns="0" bIns="0" rtlCol="0" anchor="ctr"/>
-          <a:lstStyle/>
-          <a:p>
-            <a:pPr marL="0" indent="0" algn="ctr">
-              <a:buNone/>
-            </a:pPr>
-            <a:r>
-              <a:rPr lang="en-US" sz="850" b="1" kern="0" spc="80" dirty="0">
-                <a:solidFill>
-                  <a:srgbClr val="0B7A5A"/>
-                </a:solidFill>
-                <a:latin typeface="Calibri" panose="020F0502020204030204" pitchFamily="34" charset="0"/>
-                <a:ea typeface="Calibri" panose="020F0502020204030204" pitchFamily="34" charset="-122"/>
-                <a:cs typeface="Calibri" panose="020F0502020204030204" pitchFamily="34" charset="-120"/>
-              </a:rPr>
-              <a:t>BUILT</a:t>
-            </a:r>
-            <a:endParaRPr lang="en-US" sz="850" dirty="0"/>
-          </a:p>
-        </p:txBody>
-      </p:sp>
-      <p:sp>
-        <p:nvSpPr>
-          <p:cNvPr id="48" name="Text 46"/>
-          <p:cNvSpPr/>
-          <p:nvPr/>
-        </p:nvSpPr>
-        <p:spPr>
-          <a:xfrm>
-            <a:off x="6419088" y="2907792"/>
-            <a:ext cx="2194560" cy="256032"/>
-          </a:xfrm>
-          <a:prstGeom prst="rect">
-            <a:avLst/>
-          </a:prstGeom>
-          <a:noFill/>
-        </p:spPr>
-        <p:txBody>
-          <a:bodyPr wrap="square" lIns="0" tIns="0" rIns="0" bIns="0" rtlCol="0" anchor="ctr"/>
-          <a:lstStyle/>
-          <a:p>
-            <a:pPr marL="0" indent="0">
-              <a:buNone/>
-            </a:pPr>
-            <a:r>
-              <a:rPr lang="en-US" sz="950" dirty="0">
-                <a:solidFill>
-                  <a:srgbClr val="1B2A33"/>
+          <p:cNvPr id="122" name="Text 15"/>
+          <p:cNvSpPr/>
+          <p:nvPr/>
+        </p:nvSpPr>
+        <p:spPr>
+          <a:xfrm>
+            <a:off x="6419088" y="2761488"/>
+            <a:ext cx="2194560" cy="2743200"/>
+          </a:xfrm>
+          <a:prstGeom prst="rect">
+            <a:avLst/>
+          </a:prstGeom>
+          <a:noFill/>
+        </p:spPr>
+        <p:txBody>
+          <a:bodyPr wrap="square" lIns="0" tIns="0" rIns="0" bIns="0" rtlCol="0" anchor="ctr"/>
+          <a:lstStyle/>
+          <a:p>
+            <a:pPr marL="342900" indent="-342900">
+              <a:spcAft>
+                <a:spcPts val="600"/>
+              </a:spcAft>
+              <a:buSzPct val="100000"/>
+              <a:buChar char="•"/>
+            </a:pPr>
+            <a:r>
+              <a:rPr lang="en-US" sz="1000" dirty="0">
+                <a:solidFill>
+                  <a:srgbClr val="5A6B78"/>
+                </a:solidFill>
+                <a:latin typeface="Calibri" panose="020F0502020204030204" pitchFamily="34" charset="0"/>
+                <a:ea typeface="Calibri" panose="020F0502020204030204" pitchFamily="34" charset="-122"/>
+                <a:cs typeface="Calibri" panose="020F0502020204030204" pitchFamily="34" charset="-120"/>
+              </a:rPr>
+              <a:t>Sample store and dataset builder</a:t>
+            </a:r>
+            <a:endParaRPr lang="en-US" sz="1000" dirty="0"/>
+          </a:p>
+          <a:p>
+            <a:pPr marL="342900" indent="-342900">
+              <a:spcAft>
+                <a:spcPts val="600"/>
+              </a:spcAft>
+              <a:buSzPct val="100000"/>
+              <a:buChar char="•"/>
+            </a:pPr>
+            <a:r>
+              <a:rPr lang="en-US" sz="1000" dirty="0">
+                <a:solidFill>
+                  <a:srgbClr val="5A6B78"/>
                 </a:solidFill>
                 <a:latin typeface="Calibri" panose="020F0502020204030204" pitchFamily="34" charset="0"/>
                 <a:ea typeface="Calibri" panose="020F0502020204030204" pitchFamily="34" charset="-122"/>
@@ -9230,102 +8014,20 @@
               </a:rPr>
               <a:t>Training and evaluation</a:t>
             </a:r>
-            <a:endParaRPr lang="en-US" sz="950" dirty="0"/>
-          </a:p>
-        </p:txBody>
-      </p:sp>
-      <p:sp>
-        <p:nvSpPr>
-          <p:cNvPr id="49" name="Shape 47"/>
-          <p:cNvSpPr/>
-          <p:nvPr/>
-        </p:nvSpPr>
-        <p:spPr>
-          <a:xfrm>
-            <a:off x="6419088" y="3145536"/>
-            <a:ext cx="841248" cy="237744"/>
-          </a:xfrm>
-          <a:prstGeom prst="roundRect">
-            <a:avLst>
-              <a:gd name="adj" fmla="val 15385"/>
-            </a:avLst>
-          </a:prstGeom>
-          <a:solidFill>
-            <a:srgbClr val="FBF2DF"/>
-          </a:solidFill>
-          <a:ln w="12700">
-            <a:solidFill>
-              <a:srgbClr val="FBF2DF"/>
-            </a:solidFill>
-            <a:prstDash val="solid"/>
-          </a:ln>
-        </p:spPr>
-      </p:sp>
-      <p:sp>
-        <p:nvSpPr>
-          <p:cNvPr id="50" name="Text 48"/>
-          <p:cNvSpPr/>
-          <p:nvPr/>
-        </p:nvSpPr>
-        <p:spPr>
-          <a:xfrm>
-            <a:off x="6419088" y="3145536"/>
-            <a:ext cx="841248" cy="237744"/>
-          </a:xfrm>
-          <a:prstGeom prst="rect">
-            <a:avLst/>
-          </a:prstGeom>
-          <a:noFill/>
-        </p:spPr>
-        <p:txBody>
-          <a:bodyPr wrap="square" lIns="0" tIns="0" rIns="0" bIns="0" rtlCol="0" anchor="ctr"/>
-          <a:lstStyle/>
-          <a:p>
-            <a:pPr marL="0" indent="0" algn="ctr">
-              <a:buNone/>
-            </a:pPr>
-            <a:r>
-              <a:rPr lang="en-US" sz="850" b="1" kern="0" spc="80" dirty="0">
-                <a:solidFill>
-                  <a:srgbClr val="C88A1E"/>
-                </a:solidFill>
-                <a:latin typeface="Calibri" panose="020F0502020204030204" pitchFamily="34" charset="0"/>
-                <a:ea typeface="Calibri" panose="020F0502020204030204" pitchFamily="34" charset="-122"/>
-                <a:cs typeface="Calibri" panose="020F0502020204030204" pitchFamily="34" charset="-120"/>
-              </a:rPr>
-              <a:t>IN PROGRESS</a:t>
-            </a:r>
-            <a:endParaRPr lang="en-US" sz="850" dirty="0"/>
-          </a:p>
-        </p:txBody>
-      </p:sp>
-      <p:sp>
-        <p:nvSpPr>
-          <p:cNvPr id="51" name="Text 49"/>
-          <p:cNvSpPr/>
-          <p:nvPr/>
-        </p:nvSpPr>
-        <p:spPr>
-          <a:xfrm>
-            <a:off x="6419088" y="3419856"/>
-            <a:ext cx="2194560" cy="256032"/>
-          </a:xfrm>
-          <a:prstGeom prst="rect">
-            <a:avLst/>
-          </a:prstGeom>
-          <a:noFill/>
-        </p:spPr>
-        <p:txBody>
-          <a:bodyPr wrap="square" lIns="0" tIns="0" rIns="0" bIns="0" rtlCol="0" anchor="ctr"/>
-          <a:lstStyle/>
-          <a:p>
-            <a:pPr marL="0" indent="0">
-              <a:buNone/>
-            </a:pPr>
-            <a:r>
-              <a:rPr lang="en-US" sz="950" dirty="0">
-                <a:solidFill>
-                  <a:srgbClr val="1B2A33"/>
+            <a:endParaRPr lang="en-US" sz="1000" dirty="0"/>
+          </a:p>
+          <a:p>
+            <a:pPr marL="342900" indent="-342900">
+              <a:spcAft>
+                <a:spcPts val="600"/>
+              </a:spcAft>
+              <a:buSzPct val="100000"/>
+              <a:buChar char="•"/>
+            </a:pPr>
+            <a:r>
+              <a:rPr lang="en-US" sz="1000" dirty="0">
+                <a:solidFill>
+                  <a:srgbClr val="5A6B78"/>
                 </a:solidFill>
                 <a:latin typeface="Calibri" panose="020F0502020204030204" pitchFamily="34" charset="0"/>
                 <a:ea typeface="Calibri" panose="020F0502020204030204" pitchFamily="34" charset="-122"/>
@@ -9333,102 +8035,20 @@
               </a:rPr>
               <a:t>Scoring at scan time</a:t>
             </a:r>
-            <a:endParaRPr lang="en-US" sz="950" dirty="0"/>
-          </a:p>
-        </p:txBody>
-      </p:sp>
-      <p:sp>
-        <p:nvSpPr>
-          <p:cNvPr id="52" name="Shape 50"/>
-          <p:cNvSpPr/>
-          <p:nvPr/>
-        </p:nvSpPr>
-        <p:spPr>
-          <a:xfrm>
-            <a:off x="6419088" y="3657600"/>
-            <a:ext cx="841248" cy="237744"/>
-          </a:xfrm>
-          <a:prstGeom prst="roundRect">
-            <a:avLst>
-              <a:gd name="adj" fmla="val 15385"/>
-            </a:avLst>
-          </a:prstGeom>
-          <a:solidFill>
-            <a:srgbClr val="FBF2DF"/>
-          </a:solidFill>
-          <a:ln w="12700">
-            <a:solidFill>
-              <a:srgbClr val="FBF2DF"/>
-            </a:solidFill>
-            <a:prstDash val="solid"/>
-          </a:ln>
-        </p:spPr>
-      </p:sp>
-      <p:sp>
-        <p:nvSpPr>
-          <p:cNvPr id="53" name="Text 51"/>
-          <p:cNvSpPr/>
-          <p:nvPr/>
-        </p:nvSpPr>
-        <p:spPr>
-          <a:xfrm>
-            <a:off x="6419088" y="3657600"/>
-            <a:ext cx="841248" cy="237744"/>
-          </a:xfrm>
-          <a:prstGeom prst="rect">
-            <a:avLst/>
-          </a:prstGeom>
-          <a:noFill/>
-        </p:spPr>
-        <p:txBody>
-          <a:bodyPr wrap="square" lIns="0" tIns="0" rIns="0" bIns="0" rtlCol="0" anchor="ctr"/>
-          <a:lstStyle/>
-          <a:p>
-            <a:pPr marL="0" indent="0" algn="ctr">
-              <a:buNone/>
-            </a:pPr>
-            <a:r>
-              <a:rPr lang="en-US" sz="850" b="1" kern="0" spc="80" dirty="0">
-                <a:solidFill>
-                  <a:srgbClr val="C88A1E"/>
-                </a:solidFill>
-                <a:latin typeface="Calibri" panose="020F0502020204030204" pitchFamily="34" charset="0"/>
-                <a:ea typeface="Calibri" panose="020F0502020204030204" pitchFamily="34" charset="-122"/>
-                <a:cs typeface="Calibri" panose="020F0502020204030204" pitchFamily="34" charset="-120"/>
-              </a:rPr>
-              <a:t>IN PROGRESS</a:t>
-            </a:r>
-            <a:endParaRPr lang="en-US" sz="850" dirty="0"/>
-          </a:p>
-        </p:txBody>
-      </p:sp>
-      <p:sp>
-        <p:nvSpPr>
-          <p:cNvPr id="54" name="Text 52"/>
-          <p:cNvSpPr/>
-          <p:nvPr/>
-        </p:nvSpPr>
-        <p:spPr>
-          <a:xfrm>
-            <a:off x="6419088" y="3931920"/>
-            <a:ext cx="2194560" cy="256032"/>
-          </a:xfrm>
-          <a:prstGeom prst="rect">
-            <a:avLst/>
-          </a:prstGeom>
-          <a:noFill/>
-        </p:spPr>
-        <p:txBody>
-          <a:bodyPr wrap="square" lIns="0" tIns="0" rIns="0" bIns="0" rtlCol="0" anchor="ctr"/>
-          <a:lstStyle/>
-          <a:p>
-            <a:pPr marL="0" indent="0">
-              <a:buNone/>
-            </a:pPr>
-            <a:r>
-              <a:rPr lang="en-US" sz="950" dirty="0">
-                <a:solidFill>
-                  <a:srgbClr val="1B2A33"/>
+            <a:endParaRPr lang="en-US" sz="1000" dirty="0"/>
+          </a:p>
+          <a:p>
+            <a:pPr marL="342900" indent="-342900">
+              <a:spcAft>
+                <a:spcPts val="600"/>
+              </a:spcAft>
+              <a:buSzPct val="100000"/>
+              <a:buChar char="•"/>
+            </a:pPr>
+            <a:r>
+              <a:rPr lang="en-US" sz="1000" dirty="0">
+                <a:solidFill>
+                  <a:srgbClr val="5A6B78"/>
                 </a:solidFill>
                 <a:latin typeface="Calibri" panose="020F0502020204030204" pitchFamily="34" charset="0"/>
                 <a:ea typeface="Calibri" panose="020F0502020204030204" pitchFamily="34" charset="-122"/>
@@ -9436,102 +8056,20 @@
               </a:rPr>
               <a:t>OSV advisory client</a:t>
             </a:r>
-            <a:endParaRPr lang="en-US" sz="950" dirty="0"/>
-          </a:p>
-        </p:txBody>
-      </p:sp>
-      <p:sp>
-        <p:nvSpPr>
-          <p:cNvPr id="55" name="Shape 53"/>
-          <p:cNvSpPr/>
-          <p:nvPr/>
-        </p:nvSpPr>
-        <p:spPr>
-          <a:xfrm>
-            <a:off x="6419088" y="4169664"/>
-            <a:ext cx="841248" cy="237744"/>
-          </a:xfrm>
-          <a:prstGeom prst="roundRect">
-            <a:avLst>
-              <a:gd name="adj" fmla="val 15385"/>
-            </a:avLst>
-          </a:prstGeom>
-          <a:solidFill>
-            <a:srgbClr val="E4F4EF"/>
-          </a:solidFill>
-          <a:ln w="12700">
-            <a:solidFill>
-              <a:srgbClr val="E4F4EF"/>
-            </a:solidFill>
-            <a:prstDash val="solid"/>
-          </a:ln>
-        </p:spPr>
-      </p:sp>
-      <p:sp>
-        <p:nvSpPr>
-          <p:cNvPr id="56" name="Text 54"/>
-          <p:cNvSpPr/>
-          <p:nvPr/>
-        </p:nvSpPr>
-        <p:spPr>
-          <a:xfrm>
-            <a:off x="6419088" y="4169664"/>
-            <a:ext cx="841248" cy="237744"/>
-          </a:xfrm>
-          <a:prstGeom prst="rect">
-            <a:avLst/>
-          </a:prstGeom>
-          <a:noFill/>
-        </p:spPr>
-        <p:txBody>
-          <a:bodyPr wrap="square" lIns="0" tIns="0" rIns="0" bIns="0" rtlCol="0" anchor="ctr"/>
-          <a:lstStyle/>
-          <a:p>
-            <a:pPr marL="0" indent="0" algn="ctr">
-              <a:buNone/>
-            </a:pPr>
-            <a:r>
-              <a:rPr lang="en-US" sz="850" b="1" kern="0" spc="80" dirty="0">
-                <a:solidFill>
-                  <a:srgbClr val="0B7A5A"/>
-                </a:solidFill>
-                <a:latin typeface="Calibri" panose="020F0502020204030204" pitchFamily="34" charset="0"/>
-                <a:ea typeface="Calibri" panose="020F0502020204030204" pitchFamily="34" charset="-122"/>
-                <a:cs typeface="Calibri" panose="020F0502020204030204" pitchFamily="34" charset="-120"/>
-              </a:rPr>
-              <a:t>BUILT</a:t>
-            </a:r>
-            <a:endParaRPr lang="en-US" sz="850" dirty="0"/>
-          </a:p>
-        </p:txBody>
-      </p:sp>
-      <p:sp>
-        <p:nvSpPr>
-          <p:cNvPr id="57" name="Text 55"/>
-          <p:cNvSpPr/>
-          <p:nvPr/>
-        </p:nvSpPr>
-        <p:spPr>
-          <a:xfrm>
-            <a:off x="6419088" y="4443984"/>
-            <a:ext cx="2194560" cy="256032"/>
-          </a:xfrm>
-          <a:prstGeom prst="rect">
-            <a:avLst/>
-          </a:prstGeom>
-          <a:noFill/>
-        </p:spPr>
-        <p:txBody>
-          <a:bodyPr wrap="square" lIns="0" tIns="0" rIns="0" bIns="0" rtlCol="0" anchor="ctr"/>
-          <a:lstStyle/>
-          <a:p>
-            <a:pPr marL="0" indent="0">
-              <a:buNone/>
-            </a:pPr>
-            <a:r>
-              <a:rPr lang="en-US" sz="950" dirty="0">
-                <a:solidFill>
-                  <a:srgbClr val="1B2A33"/>
+            <a:endParaRPr lang="en-US" sz="1000" dirty="0"/>
+          </a:p>
+          <a:p>
+            <a:pPr marL="342900" indent="-342900">
+              <a:spcAft>
+                <a:spcPts val="600"/>
+              </a:spcAft>
+              <a:buSzPct val="100000"/>
+              <a:buChar char="•"/>
+            </a:pPr>
+            <a:r>
+              <a:rPr lang="en-US" sz="1000" dirty="0">
+                <a:solidFill>
+                  <a:srgbClr val="5A6B78"/>
                 </a:solidFill>
                 <a:latin typeface="Calibri" panose="020F0502020204030204" pitchFamily="34" charset="0"/>
                 <a:ea typeface="Calibri" panose="020F0502020204030204" pitchFamily="34" charset="-122"/>
@@ -9539,188 +8077,41 @@
               </a:rPr>
               <a:t>Import name resolver</a:t>
             </a:r>
-            <a:endParaRPr lang="en-US" sz="950" dirty="0"/>
-          </a:p>
-        </p:txBody>
-      </p:sp>
-      <p:sp>
-        <p:nvSpPr>
-          <p:cNvPr id="58" name="Shape 56"/>
-          <p:cNvSpPr/>
-          <p:nvPr/>
-        </p:nvSpPr>
-        <p:spPr>
-          <a:xfrm>
-            <a:off x="6419088" y="4681728"/>
-            <a:ext cx="841248" cy="237744"/>
-          </a:xfrm>
-          <a:prstGeom prst="roundRect">
-            <a:avLst>
-              <a:gd name="adj" fmla="val 15385"/>
-            </a:avLst>
-          </a:prstGeom>
-          <a:solidFill>
-            <a:srgbClr val="E4F4EF"/>
-          </a:solidFill>
-          <a:ln w="12700">
-            <a:solidFill>
-              <a:srgbClr val="E4F4EF"/>
-            </a:solidFill>
-            <a:prstDash val="solid"/>
-          </a:ln>
-        </p:spPr>
-      </p:sp>
-      <p:sp>
-        <p:nvSpPr>
-          <p:cNvPr id="59" name="Text 57"/>
-          <p:cNvSpPr/>
-          <p:nvPr/>
-        </p:nvSpPr>
-        <p:spPr>
-          <a:xfrm>
-            <a:off x="6419088" y="4681728"/>
-            <a:ext cx="841248" cy="237744"/>
-          </a:xfrm>
-          <a:prstGeom prst="rect">
-            <a:avLst/>
-          </a:prstGeom>
-          <a:noFill/>
-        </p:spPr>
-        <p:txBody>
-          <a:bodyPr wrap="square" lIns="0" tIns="0" rIns="0" bIns="0" rtlCol="0" anchor="ctr"/>
-          <a:lstStyle/>
-          <a:p>
-            <a:pPr marL="0" indent="0" algn="ctr">
-              <a:buNone/>
-            </a:pPr>
-            <a:r>
-              <a:rPr lang="en-US" sz="850" b="1" kern="0" spc="80" dirty="0">
-                <a:solidFill>
-                  <a:srgbClr val="0B7A5A"/>
-                </a:solidFill>
-                <a:latin typeface="Calibri" panose="020F0502020204030204" pitchFamily="34" charset="0"/>
-                <a:ea typeface="Calibri" panose="020F0502020204030204" pitchFamily="34" charset="-122"/>
-                <a:cs typeface="Calibri" panose="020F0502020204030204" pitchFamily="34" charset="-120"/>
-              </a:rPr>
-              <a:t>BUILT</a:t>
-            </a:r>
-            <a:endParaRPr lang="en-US" sz="850" dirty="0"/>
-          </a:p>
-        </p:txBody>
-      </p:sp>
-      <p:sp>
-        <p:nvSpPr>
-          <p:cNvPr id="60" name="Text 58"/>
-          <p:cNvSpPr/>
-          <p:nvPr/>
-        </p:nvSpPr>
-        <p:spPr>
-          <a:xfrm>
-            <a:off x="6419088" y="4956048"/>
-            <a:ext cx="2194560" cy="256032"/>
-          </a:xfrm>
-          <a:prstGeom prst="rect">
-            <a:avLst/>
-          </a:prstGeom>
-          <a:noFill/>
-        </p:spPr>
-        <p:txBody>
-          <a:bodyPr wrap="square" lIns="0" tIns="0" rIns="0" bIns="0" rtlCol="0" anchor="ctr"/>
-          <a:lstStyle/>
-          <a:p>
-            <a:pPr marL="0" indent="0">
-              <a:buNone/>
-            </a:pPr>
-            <a:r>
-              <a:rPr lang="en-US" sz="950" dirty="0">
-                <a:solidFill>
-                  <a:srgbClr val="1B2A33"/>
-                </a:solidFill>
-                <a:latin typeface="Calibri" panose="020F0502020204030204" pitchFamily="34" charset="0"/>
-                <a:ea typeface="Calibri" panose="020F0502020204030204" pitchFamily="34" charset="-122"/>
-                <a:cs typeface="Calibri" panose="020F0502020204030204" pitchFamily="34" charset="-120"/>
-              </a:rPr>
-              <a:t>Reachability engine</a:t>
-            </a:r>
-            <a:endParaRPr lang="en-US" sz="950" dirty="0"/>
-          </a:p>
-        </p:txBody>
-      </p:sp>
-      <p:sp>
-        <p:nvSpPr>
-          <p:cNvPr id="61" name="Shape 59"/>
-          <p:cNvSpPr/>
-          <p:nvPr/>
-        </p:nvSpPr>
-        <p:spPr>
-          <a:xfrm>
-            <a:off x="6419088" y="5193792"/>
-            <a:ext cx="841248" cy="237744"/>
-          </a:xfrm>
-          <a:prstGeom prst="roundRect">
-            <a:avLst>
-              <a:gd name="adj" fmla="val 15385"/>
-            </a:avLst>
-          </a:prstGeom>
-          <a:solidFill>
-            <a:srgbClr val="FBF2DF"/>
-          </a:solidFill>
-          <a:ln w="12700">
-            <a:solidFill>
-              <a:srgbClr val="FBF2DF"/>
-            </a:solidFill>
-            <a:prstDash val="solid"/>
-          </a:ln>
-        </p:spPr>
-      </p:sp>
-      <p:sp>
-        <p:nvSpPr>
-          <p:cNvPr id="62" name="Text 60"/>
-          <p:cNvSpPr/>
-          <p:nvPr/>
-        </p:nvSpPr>
-        <p:spPr>
-          <a:xfrm>
-            <a:off x="6419088" y="5193792"/>
-            <a:ext cx="841248" cy="237744"/>
-          </a:xfrm>
-          <a:prstGeom prst="rect">
-            <a:avLst/>
-          </a:prstGeom>
-          <a:noFill/>
-        </p:spPr>
-        <p:txBody>
-          <a:bodyPr wrap="square" lIns="0" tIns="0" rIns="0" bIns="0" rtlCol="0" anchor="ctr"/>
-          <a:lstStyle/>
-          <a:p>
-            <a:pPr marL="0" indent="0" algn="ctr">
-              <a:buNone/>
-            </a:pPr>
-            <a:r>
-              <a:rPr lang="en-US" sz="850" b="1" kern="0" spc="80" dirty="0">
-                <a:solidFill>
-                  <a:srgbClr val="C88A1E"/>
-                </a:solidFill>
-                <a:latin typeface="Calibri" panose="020F0502020204030204" pitchFamily="34" charset="0"/>
-                <a:ea typeface="Calibri" panose="020F0502020204030204" pitchFamily="34" charset="-122"/>
-                <a:cs typeface="Calibri" panose="020F0502020204030204" pitchFamily="34" charset="-120"/>
-              </a:rPr>
-              <a:t>IN PROGRESS</a:t>
-            </a:r>
-            <a:endParaRPr lang="en-US" sz="850" dirty="0"/>
-          </a:p>
-        </p:txBody>
-      </p:sp>
-      <p:sp>
-        <p:nvSpPr>
-          <p:cNvPr id="63" name="Shape 61"/>
+            <a:endParaRPr lang="en-US" sz="1000" dirty="0"/>
+          </a:p>
+          <a:p>
+            <a:pPr marL="342900" indent="-342900">
+              <a:spcAft>
+                <a:spcPts val="600"/>
+              </a:spcAft>
+              <a:buSzPct val="100000"/>
+              <a:buChar char="•"/>
+            </a:pPr>
+            <a:r>
+              <a:rPr lang="en-US" sz="1000" dirty="0">
+                <a:solidFill>
+                  <a:srgbClr val="5A6B78"/>
+                </a:solidFill>
+                <a:latin typeface="Calibri" panose="020F0502020204030204" pitchFamily="34" charset="0"/>
+                <a:ea typeface="Calibri" panose="020F0502020204030204" pitchFamily="34" charset="-122"/>
+                <a:cs typeface="Calibri" panose="020F0502020204030204" pitchFamily="34" charset="-120"/>
+              </a:rPr>
+              <a:t>Call graph and reachability</a:t>
+            </a:r>
+            <a:endParaRPr lang="en-US" sz="1000" dirty="0"/>
+          </a:p>
+        </p:txBody>
+      </p:sp>
+      <p:sp>
+        <p:nvSpPr>
+          <p:cNvPr id="123" name="Shape 16"/>
           <p:cNvSpPr/>
           <p:nvPr/>
         </p:nvSpPr>
         <p:spPr>
           <a:xfrm>
             <a:off x="8988552" y="1691640"/>
-            <a:ext cx="2615184" cy="3931920"/>
+            <a:ext cx="2615184" cy="3977640"/>
           </a:xfrm>
           <a:prstGeom prst="roundRect">
             <a:avLst>
@@ -9740,14 +8131,33 @@
       </p:sp>
       <p:sp>
         <p:nvSpPr>
-          <p:cNvPr id="64" name="Text 62"/>
-          <p:cNvSpPr/>
-          <p:nvPr/>
-        </p:nvSpPr>
-        <p:spPr>
-          <a:xfrm>
-            <a:off x="9217152" y="1874520"/>
-            <a:ext cx="2194560" cy="457200"/>
+          <p:cNvPr id="124" name="Shape 17"/>
+          <p:cNvSpPr/>
+          <p:nvPr/>
+        </p:nvSpPr>
+        <p:spPr>
+          <a:xfrm>
+            <a:off x="9217152" y="1901952"/>
+            <a:ext cx="256032" cy="256032"/>
+          </a:xfrm>
+          <a:prstGeom prst="rect">
+            <a:avLst/>
+          </a:prstGeom>
+          <a:solidFill>
+            <a:srgbClr val="12B886"/>
+          </a:solidFill>
+        </p:spPr>
+      </p:sp>
+      <p:sp>
+        <p:nvSpPr>
+          <p:cNvPr id="125" name="Text 18"/>
+          <p:cNvSpPr/>
+          <p:nvPr/>
+        </p:nvSpPr>
+        <p:spPr>
+          <a:xfrm>
+            <a:off x="9217152" y="2240280"/>
+            <a:ext cx="2194560" cy="502920"/>
           </a:xfrm>
           <a:prstGeom prst="rect">
             <a:avLst/>
@@ -9778,31 +8188,35 @@
       </p:sp>
       <p:sp>
         <p:nvSpPr>
-          <p:cNvPr id="65" name="Text 63"/>
-          <p:cNvSpPr/>
-          <p:nvPr/>
-        </p:nvSpPr>
-        <p:spPr>
-          <a:xfrm>
-            <a:off x="9217152" y="2395728"/>
-            <a:ext cx="2194560" cy="256032"/>
-          </a:xfrm>
-          <a:prstGeom prst="rect">
-            <a:avLst/>
-          </a:prstGeom>
-          <a:noFill/>
-        </p:spPr>
-        <p:txBody>
-          <a:bodyPr wrap="square" lIns="0" tIns="0" rIns="0" bIns="0" rtlCol="0" anchor="ctr"/>
-          <a:lstStyle/>
-          <a:p>
-            <a:pPr marL="0" indent="0">
-              <a:buNone/>
-            </a:pPr>
-            <a:r>
-              <a:rPr lang="en-US" sz="950" dirty="0">
-                <a:solidFill>
-                  <a:srgbClr val="1B2A33"/>
+          <p:cNvPr id="126" name="Text 19"/>
+          <p:cNvSpPr/>
+          <p:nvPr/>
+        </p:nvSpPr>
+        <p:spPr>
+          <a:xfrm>
+            <a:off x="9217152" y="2761488"/>
+            <a:ext cx="2194560" cy="2743200"/>
+          </a:xfrm>
+          <a:prstGeom prst="rect">
+            <a:avLst/>
+          </a:prstGeom>
+          <a:noFill/>
+        </p:spPr>
+        <p:txBody>
+          <a:bodyPr wrap="square" lIns="0" tIns="0" rIns="0" bIns="0" rtlCol="0" anchor="ctr"/>
+          <a:lstStyle/>
+          <a:p>
+            <a:pPr marL="342900" indent="-342900">
+              <a:spcAft>
+                <a:spcPts val="600"/>
+              </a:spcAft>
+              <a:buSzPct val="100000"/>
+              <a:buChar char="•"/>
+            </a:pPr>
+            <a:r>
+              <a:rPr lang="en-US" sz="1000" dirty="0">
+                <a:solidFill>
+                  <a:srgbClr val="5A6B78"/>
                 </a:solidFill>
                 <a:latin typeface="Calibri" panose="020F0502020204030204" pitchFamily="34" charset="0"/>
                 <a:ea typeface="Calibri" panose="020F0502020204030204" pitchFamily="34" charset="-122"/>
@@ -9810,102 +8224,20 @@
               </a:rPr>
               <a:t>Scan orchestrator</a:t>
             </a:r>
-            <a:endParaRPr lang="en-US" sz="950" dirty="0"/>
-          </a:p>
-        </p:txBody>
-      </p:sp>
-      <p:sp>
-        <p:nvSpPr>
-          <p:cNvPr id="66" name="Shape 64"/>
-          <p:cNvSpPr/>
-          <p:nvPr/>
-        </p:nvSpPr>
-        <p:spPr>
-          <a:xfrm>
-            <a:off x="9217152" y="2633472"/>
-            <a:ext cx="841248" cy="237744"/>
-          </a:xfrm>
-          <a:prstGeom prst="roundRect">
-            <a:avLst>
-              <a:gd name="adj" fmla="val 15385"/>
-            </a:avLst>
-          </a:prstGeom>
-          <a:solidFill>
-            <a:srgbClr val="E4F4EF"/>
-          </a:solidFill>
-          <a:ln w="12700">
-            <a:solidFill>
-              <a:srgbClr val="E4F4EF"/>
-            </a:solidFill>
-            <a:prstDash val="solid"/>
-          </a:ln>
-        </p:spPr>
-      </p:sp>
-      <p:sp>
-        <p:nvSpPr>
-          <p:cNvPr id="67" name="Text 65"/>
-          <p:cNvSpPr/>
-          <p:nvPr/>
-        </p:nvSpPr>
-        <p:spPr>
-          <a:xfrm>
-            <a:off x="9217152" y="2633472"/>
-            <a:ext cx="841248" cy="237744"/>
-          </a:xfrm>
-          <a:prstGeom prst="rect">
-            <a:avLst/>
-          </a:prstGeom>
-          <a:noFill/>
-        </p:spPr>
-        <p:txBody>
-          <a:bodyPr wrap="square" lIns="0" tIns="0" rIns="0" bIns="0" rtlCol="0" anchor="ctr"/>
-          <a:lstStyle/>
-          <a:p>
-            <a:pPr marL="0" indent="0" algn="ctr">
-              <a:buNone/>
-            </a:pPr>
-            <a:r>
-              <a:rPr lang="en-US" sz="850" b="1" kern="0" spc="80" dirty="0">
-                <a:solidFill>
-                  <a:srgbClr val="0B7A5A"/>
-                </a:solidFill>
-                <a:latin typeface="Calibri" panose="020F0502020204030204" pitchFamily="34" charset="0"/>
-                <a:ea typeface="Calibri" panose="020F0502020204030204" pitchFamily="34" charset="-122"/>
-                <a:cs typeface="Calibri" panose="020F0502020204030204" pitchFamily="34" charset="-120"/>
-              </a:rPr>
-              <a:t>BUILT</a:t>
-            </a:r>
-            <a:endParaRPr lang="en-US" sz="850" dirty="0"/>
-          </a:p>
-        </p:txBody>
-      </p:sp>
-      <p:sp>
-        <p:nvSpPr>
-          <p:cNvPr id="68" name="Text 66"/>
-          <p:cNvSpPr/>
-          <p:nvPr/>
-        </p:nvSpPr>
-        <p:spPr>
-          <a:xfrm>
-            <a:off x="9217152" y="2907792"/>
-            <a:ext cx="2194560" cy="256032"/>
-          </a:xfrm>
-          <a:prstGeom prst="rect">
-            <a:avLst/>
-          </a:prstGeom>
-          <a:noFill/>
-        </p:spPr>
-        <p:txBody>
-          <a:bodyPr wrap="square" lIns="0" tIns="0" rIns="0" bIns="0" rtlCol="0" anchor="ctr"/>
-          <a:lstStyle/>
-          <a:p>
-            <a:pPr marL="0" indent="0">
-              <a:buNone/>
-            </a:pPr>
-            <a:r>
-              <a:rPr lang="en-US" sz="950" dirty="0">
-                <a:solidFill>
-                  <a:srgbClr val="1B2A33"/>
+            <a:endParaRPr lang="en-US" sz="1000" dirty="0"/>
+          </a:p>
+          <a:p>
+            <a:pPr marL="342900" indent="-342900">
+              <a:spcAft>
+                <a:spcPts val="600"/>
+              </a:spcAft>
+              <a:buSzPct val="100000"/>
+              <a:buChar char="•"/>
+            </a:pPr>
+            <a:r>
+              <a:rPr lang="en-US" sz="1000" dirty="0">
+                <a:solidFill>
+                  <a:srgbClr val="5A6B78"/>
                 </a:solidFill>
                 <a:latin typeface="Calibri" panose="020F0502020204030204" pitchFamily="34" charset="0"/>
                 <a:ea typeface="Calibri" panose="020F0502020204030204" pitchFamily="34" charset="-122"/>
@@ -9913,205 +8245,41 @@
               </a:rPr>
               <a:t>Plain English explanations</a:t>
             </a:r>
-            <a:endParaRPr lang="en-US" sz="950" dirty="0"/>
-          </a:p>
-        </p:txBody>
-      </p:sp>
-      <p:sp>
-        <p:nvSpPr>
-          <p:cNvPr id="69" name="Shape 67"/>
-          <p:cNvSpPr/>
-          <p:nvPr/>
-        </p:nvSpPr>
-        <p:spPr>
-          <a:xfrm>
-            <a:off x="9217152" y="3145536"/>
-            <a:ext cx="841248" cy="237744"/>
-          </a:xfrm>
-          <a:prstGeom prst="roundRect">
-            <a:avLst>
-              <a:gd name="adj" fmla="val 15385"/>
-            </a:avLst>
-          </a:prstGeom>
-          <a:solidFill>
-            <a:srgbClr val="FBF2DF"/>
-          </a:solidFill>
-          <a:ln w="12700">
-            <a:solidFill>
-              <a:srgbClr val="FBF2DF"/>
-            </a:solidFill>
-            <a:prstDash val="solid"/>
-          </a:ln>
-        </p:spPr>
-      </p:sp>
-      <p:sp>
-        <p:nvSpPr>
-          <p:cNvPr id="70" name="Text 68"/>
-          <p:cNvSpPr/>
-          <p:nvPr/>
-        </p:nvSpPr>
-        <p:spPr>
-          <a:xfrm>
-            <a:off x="9217152" y="3145536"/>
-            <a:ext cx="841248" cy="237744"/>
-          </a:xfrm>
-          <a:prstGeom prst="rect">
-            <a:avLst/>
-          </a:prstGeom>
-          <a:noFill/>
-        </p:spPr>
-        <p:txBody>
-          <a:bodyPr wrap="square" lIns="0" tIns="0" rIns="0" bIns="0" rtlCol="0" anchor="ctr"/>
-          <a:lstStyle/>
-          <a:p>
-            <a:pPr marL="0" indent="0" algn="ctr">
-              <a:buNone/>
-            </a:pPr>
-            <a:r>
-              <a:rPr lang="en-US" sz="850" b="1" kern="0" spc="80" dirty="0">
-                <a:solidFill>
-                  <a:srgbClr val="C88A1E"/>
-                </a:solidFill>
-                <a:latin typeface="Calibri" panose="020F0502020204030204" pitchFamily="34" charset="0"/>
-                <a:ea typeface="Calibri" panose="020F0502020204030204" pitchFamily="34" charset="-122"/>
-                <a:cs typeface="Calibri" panose="020F0502020204030204" pitchFamily="34" charset="-120"/>
-              </a:rPr>
-              <a:t>IN PROGRESS</a:t>
-            </a:r>
-            <a:endParaRPr lang="en-US" sz="850" dirty="0"/>
-          </a:p>
-        </p:txBody>
-      </p:sp>
-      <p:sp>
-        <p:nvSpPr>
-          <p:cNvPr id="71" name="Text 69"/>
-          <p:cNvSpPr/>
-          <p:nvPr/>
-        </p:nvSpPr>
-        <p:spPr>
-          <a:xfrm>
-            <a:off x="9217152" y="3419856"/>
-            <a:ext cx="2194560" cy="256032"/>
-          </a:xfrm>
-          <a:prstGeom prst="rect">
-            <a:avLst/>
-          </a:prstGeom>
-          <a:noFill/>
-        </p:spPr>
-        <p:txBody>
-          <a:bodyPr wrap="square" lIns="0" tIns="0" rIns="0" bIns="0" rtlCol="0" anchor="ctr"/>
-          <a:lstStyle/>
-          <a:p>
-            <a:pPr marL="0" indent="0">
-              <a:buNone/>
-            </a:pPr>
-            <a:r>
-              <a:rPr lang="en-US" sz="950" dirty="0">
-                <a:solidFill>
-                  <a:srgbClr val="1B2A33"/>
-                </a:solidFill>
-                <a:latin typeface="Calibri" panose="020F0502020204030204" pitchFamily="34" charset="0"/>
-                <a:ea typeface="Calibri" panose="020F0502020204030204" pitchFamily="34" charset="-122"/>
-                <a:cs typeface="Calibri" panose="020F0502020204030204" pitchFamily="34" charset="-120"/>
-              </a:rPr>
-              <a:t>Report writer</a:t>
-            </a:r>
-            <a:endParaRPr lang="en-US" sz="950" dirty="0"/>
-          </a:p>
-        </p:txBody>
-      </p:sp>
-      <p:sp>
-        <p:nvSpPr>
-          <p:cNvPr id="72" name="Shape 70"/>
-          <p:cNvSpPr/>
-          <p:nvPr/>
-        </p:nvSpPr>
-        <p:spPr>
-          <a:xfrm>
-            <a:off x="9217152" y="3657600"/>
-            <a:ext cx="841248" cy="237744"/>
-          </a:xfrm>
-          <a:prstGeom prst="roundRect">
-            <a:avLst>
-              <a:gd name="adj" fmla="val 15385"/>
-            </a:avLst>
-          </a:prstGeom>
-          <a:solidFill>
-            <a:srgbClr val="FBF2DF"/>
-          </a:solidFill>
-          <a:ln w="12700">
-            <a:solidFill>
-              <a:srgbClr val="FBF2DF"/>
-            </a:solidFill>
-            <a:prstDash val="solid"/>
-          </a:ln>
-        </p:spPr>
-      </p:sp>
-      <p:sp>
-        <p:nvSpPr>
-          <p:cNvPr id="73" name="Text 71"/>
-          <p:cNvSpPr/>
-          <p:nvPr/>
-        </p:nvSpPr>
-        <p:spPr>
-          <a:xfrm>
-            <a:off x="9217152" y="3657600"/>
-            <a:ext cx="841248" cy="237744"/>
-          </a:xfrm>
-          <a:prstGeom prst="rect">
-            <a:avLst/>
-          </a:prstGeom>
-          <a:noFill/>
-        </p:spPr>
-        <p:txBody>
-          <a:bodyPr wrap="square" lIns="0" tIns="0" rIns="0" bIns="0" rtlCol="0" anchor="ctr"/>
-          <a:lstStyle/>
-          <a:p>
-            <a:pPr marL="0" indent="0" algn="ctr">
-              <a:buNone/>
-            </a:pPr>
-            <a:r>
-              <a:rPr lang="en-US" sz="850" b="1" kern="0" spc="80" dirty="0">
-                <a:solidFill>
-                  <a:srgbClr val="C88A1E"/>
-                </a:solidFill>
-                <a:latin typeface="Calibri" panose="020F0502020204030204" pitchFamily="34" charset="0"/>
-                <a:ea typeface="Calibri" panose="020F0502020204030204" pitchFamily="34" charset="-122"/>
-                <a:cs typeface="Calibri" panose="020F0502020204030204" pitchFamily="34" charset="-120"/>
-              </a:rPr>
-              <a:t>IN PROGRESS</a:t>
-            </a:r>
-            <a:endParaRPr lang="en-US" sz="850" dirty="0"/>
-          </a:p>
-        </p:txBody>
-      </p:sp>
-      <p:sp>
-        <p:nvSpPr>
-          <p:cNvPr id="74" name="Text 72"/>
-          <p:cNvSpPr/>
-          <p:nvPr/>
-        </p:nvSpPr>
-        <p:spPr>
-          <a:xfrm>
-            <a:off x="9217152" y="3931920"/>
-            <a:ext cx="2194560" cy="256032"/>
-          </a:xfrm>
-          <a:prstGeom prst="rect">
-            <a:avLst/>
-          </a:prstGeom>
-          <a:noFill/>
-        </p:spPr>
-        <p:txBody>
-          <a:bodyPr wrap="square" lIns="0" tIns="0" rIns="0" bIns="0" rtlCol="0" anchor="ctr"/>
-          <a:lstStyle/>
-          <a:p>
-            <a:pPr marL="0" indent="0">
-              <a:buNone/>
-            </a:pPr>
-            <a:r>
-              <a:rPr lang="en-US" sz="950" dirty="0">
-                <a:solidFill>
-                  <a:srgbClr val="1B2A33"/>
+            <a:endParaRPr lang="en-US" sz="1000" dirty="0"/>
+          </a:p>
+          <a:p>
+            <a:pPr marL="342900" indent="-342900">
+              <a:spcAft>
+                <a:spcPts val="600"/>
+              </a:spcAft>
+              <a:buSzPct val="100000"/>
+              <a:buChar char="•"/>
+            </a:pPr>
+            <a:r>
+              <a:rPr lang="en-US" sz="1000" dirty="0">
+                <a:solidFill>
+                  <a:srgbClr val="5A6B78"/>
+                </a:solidFill>
+                <a:latin typeface="Calibri" panose="020F0502020204030204" pitchFamily="34" charset="0"/>
+                <a:ea typeface="Calibri" panose="020F0502020204030204" pitchFamily="34" charset="-122"/>
+                <a:cs typeface="Calibri" panose="020F0502020204030204" pitchFamily="34" charset="-120"/>
+              </a:rPr>
+              <a:t>HTML report writer</a:t>
+            </a:r>
+            <a:endParaRPr lang="en-US" sz="1000" dirty="0"/>
+          </a:p>
+          <a:p>
+            <a:pPr marL="342900" indent="-342900">
+              <a:spcAft>
+                <a:spcPts val="600"/>
+              </a:spcAft>
+              <a:buSzPct val="100000"/>
+              <a:buChar char="•"/>
+            </a:pPr>
+            <a:r>
+              <a:rPr lang="en-US" sz="1000" dirty="0">
+                <a:solidFill>
+                  <a:srgbClr val="5A6B78"/>
                 </a:solidFill>
                 <a:latin typeface="Calibri" panose="020F0502020204030204" pitchFamily="34" charset="0"/>
                 <a:ea typeface="Calibri" panose="020F0502020204030204" pitchFamily="34" charset="-122"/>
@@ -10119,102 +8287,20 @@
               </a:rPr>
               <a:t>API and background jobs</a:t>
             </a:r>
-            <a:endParaRPr lang="en-US" sz="950" dirty="0"/>
-          </a:p>
-        </p:txBody>
-      </p:sp>
-      <p:sp>
-        <p:nvSpPr>
-          <p:cNvPr id="75" name="Shape 73"/>
-          <p:cNvSpPr/>
-          <p:nvPr/>
-        </p:nvSpPr>
-        <p:spPr>
-          <a:xfrm>
-            <a:off x="9217152" y="4169664"/>
-            <a:ext cx="841248" cy="237744"/>
-          </a:xfrm>
-          <a:prstGeom prst="roundRect">
-            <a:avLst>
-              <a:gd name="adj" fmla="val 15385"/>
-            </a:avLst>
-          </a:prstGeom>
-          <a:solidFill>
-            <a:srgbClr val="E4F4EF"/>
-          </a:solidFill>
-          <a:ln w="12700">
-            <a:solidFill>
-              <a:srgbClr val="E4F4EF"/>
-            </a:solidFill>
-            <a:prstDash val="solid"/>
-          </a:ln>
-        </p:spPr>
-      </p:sp>
-      <p:sp>
-        <p:nvSpPr>
-          <p:cNvPr id="76" name="Text 74"/>
-          <p:cNvSpPr/>
-          <p:nvPr/>
-        </p:nvSpPr>
-        <p:spPr>
-          <a:xfrm>
-            <a:off x="9217152" y="4169664"/>
-            <a:ext cx="841248" cy="237744"/>
-          </a:xfrm>
-          <a:prstGeom prst="rect">
-            <a:avLst/>
-          </a:prstGeom>
-          <a:noFill/>
-        </p:spPr>
-        <p:txBody>
-          <a:bodyPr wrap="square" lIns="0" tIns="0" rIns="0" bIns="0" rtlCol="0" anchor="ctr"/>
-          <a:lstStyle/>
-          <a:p>
-            <a:pPr marL="0" indent="0" algn="ctr">
-              <a:buNone/>
-            </a:pPr>
-            <a:r>
-              <a:rPr lang="en-US" sz="850" b="1" kern="0" spc="80" dirty="0">
-                <a:solidFill>
-                  <a:srgbClr val="0B7A5A"/>
-                </a:solidFill>
-                <a:latin typeface="Calibri" panose="020F0502020204030204" pitchFamily="34" charset="0"/>
-                <a:ea typeface="Calibri" panose="020F0502020204030204" pitchFamily="34" charset="-122"/>
-                <a:cs typeface="Calibri" panose="020F0502020204030204" pitchFamily="34" charset="-120"/>
-              </a:rPr>
-              <a:t>BUILT</a:t>
-            </a:r>
-            <a:endParaRPr lang="en-US" sz="850" dirty="0"/>
-          </a:p>
-        </p:txBody>
-      </p:sp>
-      <p:sp>
-        <p:nvSpPr>
-          <p:cNvPr id="77" name="Text 75"/>
-          <p:cNvSpPr/>
-          <p:nvPr/>
-        </p:nvSpPr>
-        <p:spPr>
-          <a:xfrm>
-            <a:off x="9217152" y="4443984"/>
-            <a:ext cx="2194560" cy="256032"/>
-          </a:xfrm>
-          <a:prstGeom prst="rect">
-            <a:avLst/>
-          </a:prstGeom>
-          <a:noFill/>
-        </p:spPr>
-        <p:txBody>
-          <a:bodyPr wrap="square" lIns="0" tIns="0" rIns="0" bIns="0" rtlCol="0" anchor="ctr"/>
-          <a:lstStyle/>
-          <a:p>
-            <a:pPr marL="0" indent="0">
-              <a:buNone/>
-            </a:pPr>
-            <a:r>
-              <a:rPr lang="en-US" sz="950" dirty="0">
-                <a:solidFill>
-                  <a:srgbClr val="1B2A33"/>
+            <a:endParaRPr lang="en-US" sz="1000" dirty="0"/>
+          </a:p>
+          <a:p>
+            <a:pPr marL="342900" indent="-342900">
+              <a:spcAft>
+                <a:spcPts val="600"/>
+              </a:spcAft>
+              <a:buSzPct val="100000"/>
+              <a:buChar char="•"/>
+            </a:pPr>
+            <a:r>
+              <a:rPr lang="en-US" sz="1000" dirty="0">
+                <a:solidFill>
+                  <a:srgbClr val="5A6B78"/>
                 </a:solidFill>
                 <a:latin typeface="Calibri" panose="020F0502020204030204" pitchFamily="34" charset="0"/>
                 <a:ea typeface="Calibri" panose="020F0502020204030204" pitchFamily="34" charset="-122"/>
@@ -10222,102 +8308,20 @@
               </a:rPr>
               <a:t>Scan history storage</a:t>
             </a:r>
-            <a:endParaRPr lang="en-US" sz="950" dirty="0"/>
-          </a:p>
-        </p:txBody>
-      </p:sp>
-      <p:sp>
-        <p:nvSpPr>
-          <p:cNvPr id="78" name="Shape 76"/>
-          <p:cNvSpPr/>
-          <p:nvPr/>
-        </p:nvSpPr>
-        <p:spPr>
-          <a:xfrm>
-            <a:off x="9217152" y="4681728"/>
-            <a:ext cx="841248" cy="237744"/>
-          </a:xfrm>
-          <a:prstGeom prst="roundRect">
-            <a:avLst>
-              <a:gd name="adj" fmla="val 15385"/>
-            </a:avLst>
-          </a:prstGeom>
-          <a:solidFill>
-            <a:srgbClr val="E4F4EF"/>
-          </a:solidFill>
-          <a:ln w="12700">
-            <a:solidFill>
-              <a:srgbClr val="E4F4EF"/>
-            </a:solidFill>
-            <a:prstDash val="solid"/>
-          </a:ln>
-        </p:spPr>
-      </p:sp>
-      <p:sp>
-        <p:nvSpPr>
-          <p:cNvPr id="79" name="Text 77"/>
-          <p:cNvSpPr/>
-          <p:nvPr/>
-        </p:nvSpPr>
-        <p:spPr>
-          <a:xfrm>
-            <a:off x="9217152" y="4681728"/>
-            <a:ext cx="841248" cy="237744"/>
-          </a:xfrm>
-          <a:prstGeom prst="rect">
-            <a:avLst/>
-          </a:prstGeom>
-          <a:noFill/>
-        </p:spPr>
-        <p:txBody>
-          <a:bodyPr wrap="square" lIns="0" tIns="0" rIns="0" bIns="0" rtlCol="0" anchor="ctr"/>
-          <a:lstStyle/>
-          <a:p>
-            <a:pPr marL="0" indent="0" algn="ctr">
-              <a:buNone/>
-            </a:pPr>
-            <a:r>
-              <a:rPr lang="en-US" sz="850" b="1" kern="0" spc="80" dirty="0">
-                <a:solidFill>
-                  <a:srgbClr val="0B7A5A"/>
-                </a:solidFill>
-                <a:latin typeface="Calibri" panose="020F0502020204030204" pitchFamily="34" charset="0"/>
-                <a:ea typeface="Calibri" panose="020F0502020204030204" pitchFamily="34" charset="-122"/>
-                <a:cs typeface="Calibri" panose="020F0502020204030204" pitchFamily="34" charset="-120"/>
-              </a:rPr>
-              <a:t>BUILT</a:t>
-            </a:r>
-            <a:endParaRPr lang="en-US" sz="850" dirty="0"/>
-          </a:p>
-        </p:txBody>
-      </p:sp>
-      <p:sp>
-        <p:nvSpPr>
-          <p:cNvPr id="80" name="Text 78"/>
-          <p:cNvSpPr/>
-          <p:nvPr/>
-        </p:nvSpPr>
-        <p:spPr>
-          <a:xfrm>
-            <a:off x="9217152" y="4956048"/>
-            <a:ext cx="2194560" cy="256032"/>
-          </a:xfrm>
-          <a:prstGeom prst="rect">
-            <a:avLst/>
-          </a:prstGeom>
-          <a:noFill/>
-        </p:spPr>
-        <p:txBody>
-          <a:bodyPr wrap="square" lIns="0" tIns="0" rIns="0" bIns="0" rtlCol="0" anchor="ctr"/>
-          <a:lstStyle/>
-          <a:p>
-            <a:pPr marL="0" indent="0">
-              <a:buNone/>
-            </a:pPr>
-            <a:r>
-              <a:rPr lang="en-US" sz="950" dirty="0">
-                <a:solidFill>
-                  <a:srgbClr val="1B2A33"/>
+            <a:endParaRPr lang="en-US" sz="1000" dirty="0"/>
+          </a:p>
+          <a:p>
+            <a:pPr marL="342900" indent="-342900">
+              <a:spcAft>
+                <a:spcPts val="600"/>
+              </a:spcAft>
+              <a:buSzPct val="100000"/>
+              <a:buChar char="•"/>
+            </a:pPr>
+            <a:r>
+              <a:rPr lang="en-US" sz="1000" dirty="0">
+                <a:solidFill>
+                  <a:srgbClr val="5A6B78"/>
                 </a:solidFill>
                 <a:latin typeface="Calibri" panose="020F0502020204030204" pitchFamily="34" charset="0"/>
                 <a:ea typeface="Calibri" panose="020F0502020204030204" pitchFamily="34" charset="-122"/>
@@ -10325,84 +8329,19 @@
               </a:rPr>
               <a:t>Dashboard</a:t>
             </a:r>
-            <a:endParaRPr lang="en-US" sz="950" dirty="0"/>
-          </a:p>
-        </p:txBody>
-      </p:sp>
-      <p:sp>
-        <p:nvSpPr>
-          <p:cNvPr id="81" name="Shape 79"/>
-          <p:cNvSpPr/>
-          <p:nvPr/>
-        </p:nvSpPr>
-        <p:spPr>
-          <a:xfrm>
-            <a:off x="9217152" y="5193792"/>
-            <a:ext cx="841248" cy="237744"/>
-          </a:xfrm>
-          <a:prstGeom prst="roundRect">
-            <a:avLst>
-              <a:gd name="adj" fmla="val 15385"/>
-            </a:avLst>
-          </a:prstGeom>
-          <a:solidFill>
-            <a:srgbClr val="FBF2DF"/>
-          </a:solidFill>
-          <a:ln w="12700">
-            <a:solidFill>
-              <a:srgbClr val="FBF2DF"/>
-            </a:solidFill>
-            <a:prstDash val="solid"/>
-          </a:ln>
-        </p:spPr>
-      </p:sp>
-      <p:sp>
-        <p:nvSpPr>
-          <p:cNvPr id="82" name="Text 80"/>
-          <p:cNvSpPr/>
-          <p:nvPr/>
-        </p:nvSpPr>
-        <p:spPr>
-          <a:xfrm>
-            <a:off x="9217152" y="5193792"/>
-            <a:ext cx="841248" cy="237744"/>
-          </a:xfrm>
-          <a:prstGeom prst="rect">
-            <a:avLst/>
-          </a:prstGeom>
-          <a:noFill/>
-        </p:spPr>
-        <p:txBody>
-          <a:bodyPr wrap="square" lIns="0" tIns="0" rIns="0" bIns="0" rtlCol="0" anchor="ctr"/>
-          <a:lstStyle/>
-          <a:p>
-            <a:pPr marL="0" indent="0" algn="ctr">
-              <a:buNone/>
-            </a:pPr>
-            <a:r>
-              <a:rPr lang="en-US" sz="850" b="1" kern="0" spc="80" dirty="0">
-                <a:solidFill>
-                  <a:srgbClr val="C88A1E"/>
-                </a:solidFill>
-                <a:latin typeface="Calibri" panose="020F0502020204030204" pitchFamily="34" charset="0"/>
-                <a:ea typeface="Calibri" panose="020F0502020204030204" pitchFamily="34" charset="-122"/>
-                <a:cs typeface="Calibri" panose="020F0502020204030204" pitchFamily="34" charset="-120"/>
-              </a:rPr>
-              <a:t>IN PROGRESS</a:t>
-            </a:r>
-            <a:endParaRPr lang="en-US" sz="850" dirty="0"/>
-          </a:p>
-        </p:txBody>
-      </p:sp>
-      <p:sp>
-        <p:nvSpPr>
-          <p:cNvPr id="83" name="Text 81"/>
-          <p:cNvSpPr/>
-          <p:nvPr/>
-        </p:nvSpPr>
-        <p:spPr>
-          <a:xfrm>
-            <a:off x="594360" y="5806440"/>
+            <a:endParaRPr lang="en-US" sz="1000" dirty="0"/>
+          </a:p>
+        </p:txBody>
+      </p:sp>
+      <p:sp>
+        <p:nvSpPr>
+          <p:cNvPr id="127" name="Text 20"/>
+          <p:cNvSpPr/>
+          <p:nvPr/>
+        </p:nvSpPr>
+        <p:spPr>
+          <a:xfrm>
+            <a:off x="594360" y="5852160"/>
             <a:ext cx="10881360" cy="320040"/>
           </a:xfrm>
           <a:prstGeom prst="rect">
@@ -10434,7 +8373,7 @@
       </p:sp>
       <p:sp>
         <p:nvSpPr>
-          <p:cNvPr id="84" name="Text 82"/>
+          <p:cNvPr id="128" name="Text 21"/>
           <p:cNvSpPr/>
           <p:nvPr/>
         </p:nvSpPr>
@@ -15630,7 +13569,11 @@
         <p:nvSpPr>
           <p:cNvPr id="10" name="Text 8"/>
           <p:cNvSpPr/>
-          <p:nvPr/>
+          <p:nvPr>
+            <p:custDataLst>
+              <p:tags r:id="rId1"/>
+            </p:custDataLst>
+          </p:nvPr>
         </p:nvSpPr>
         <p:spPr>
           <a:xfrm>
@@ -15668,7 +13611,11 @@
         <p:nvSpPr>
           <p:cNvPr id="11" name="Text 9"/>
           <p:cNvSpPr/>
-          <p:nvPr/>
+          <p:nvPr>
+            <p:custDataLst>
+              <p:tags r:id="rId2"/>
+            </p:custDataLst>
+          </p:nvPr>
         </p:nvSpPr>
         <p:spPr>
           <a:xfrm>
@@ -15704,74 +13651,13 @@
       </p:sp>
       <p:sp>
         <p:nvSpPr>
-          <p:cNvPr id="12" name="Shape 10"/>
-          <p:cNvSpPr/>
-          <p:nvPr/>
-        </p:nvSpPr>
-        <p:spPr>
-          <a:xfrm>
-            <a:off x="10515600" y="2157984"/>
-            <a:ext cx="1051560" cy="237744"/>
-          </a:xfrm>
-          <a:prstGeom prst="roundRect">
-            <a:avLst>
-              <a:gd name="adj" fmla="val 15385"/>
-            </a:avLst>
-          </a:prstGeom>
-          <a:solidFill>
-            <a:srgbClr val="E4F4EF"/>
-          </a:solidFill>
-          <a:ln w="12700">
-            <a:solidFill>
-              <a:srgbClr val="E4F4EF"/>
-            </a:solidFill>
-            <a:prstDash val="solid"/>
-          </a:ln>
-        </p:spPr>
-      </p:sp>
-      <p:sp>
-        <p:nvSpPr>
-          <p:cNvPr id="13" name="Text 11"/>
-          <p:cNvSpPr/>
-          <p:nvPr/>
-        </p:nvSpPr>
-        <p:spPr>
-          <a:xfrm>
-            <a:off x="10515600" y="2157984"/>
-            <a:ext cx="1051560" cy="237744"/>
-          </a:xfrm>
-          <a:prstGeom prst="rect">
-            <a:avLst/>
-          </a:prstGeom>
-          <a:noFill/>
-        </p:spPr>
-        <p:txBody>
-          <a:bodyPr wrap="square" lIns="0" tIns="0" rIns="0" bIns="0" rtlCol="0" anchor="ctr"/>
-          <a:lstStyle/>
-          <a:p>
-            <a:pPr marL="0" indent="0" algn="ctr">
-              <a:buNone/>
-            </a:pPr>
-            <a:r>
-              <a:rPr lang="en-US" sz="850" b="1" kern="0" spc="80" dirty="0">
-                <a:solidFill>
-                  <a:srgbClr val="0B7A5A"/>
-                </a:solidFill>
-                <a:latin typeface="Calibri" panose="020F0502020204030204" pitchFamily="34" charset="0"/>
-                <a:ea typeface="Calibri" panose="020F0502020204030204" pitchFamily="34" charset="-122"/>
-                <a:cs typeface="Calibri" panose="020F0502020204030204" pitchFamily="34" charset="-120"/>
-              </a:rPr>
-              <a:t>BUILT</a:t>
-            </a:r>
-            <a:endParaRPr lang="en-US" sz="850" dirty="0"/>
-          </a:p>
-        </p:txBody>
-      </p:sp>
-      <p:sp>
-        <p:nvSpPr>
           <p:cNvPr id="14" name="Text 12"/>
           <p:cNvSpPr/>
-          <p:nvPr/>
+          <p:nvPr>
+            <p:custDataLst>
+              <p:tags r:id="rId3"/>
+            </p:custDataLst>
+          </p:nvPr>
         </p:nvSpPr>
         <p:spPr>
           <a:xfrm>
@@ -15809,7 +13695,11 @@
         <p:nvSpPr>
           <p:cNvPr id="15" name="Text 13"/>
           <p:cNvSpPr/>
-          <p:nvPr/>
+          <p:nvPr>
+            <p:custDataLst>
+              <p:tags r:id="rId4"/>
+            </p:custDataLst>
+          </p:nvPr>
         </p:nvSpPr>
         <p:spPr>
           <a:xfrm>
@@ -15845,74 +13735,13 @@
       </p:sp>
       <p:sp>
         <p:nvSpPr>
-          <p:cNvPr id="16" name="Shape 14"/>
-          <p:cNvSpPr/>
-          <p:nvPr/>
-        </p:nvSpPr>
-        <p:spPr>
-          <a:xfrm>
-            <a:off x="10515600" y="2816352"/>
-            <a:ext cx="1051560" cy="237744"/>
-          </a:xfrm>
-          <a:prstGeom prst="roundRect">
-            <a:avLst>
-              <a:gd name="adj" fmla="val 15385"/>
-            </a:avLst>
-          </a:prstGeom>
-          <a:solidFill>
-            <a:srgbClr val="FBF2DF"/>
-          </a:solidFill>
-          <a:ln w="12700">
-            <a:solidFill>
-              <a:srgbClr val="FBF2DF"/>
-            </a:solidFill>
-            <a:prstDash val="solid"/>
-          </a:ln>
-        </p:spPr>
-      </p:sp>
-      <p:sp>
-        <p:nvSpPr>
-          <p:cNvPr id="17" name="Text 15"/>
-          <p:cNvSpPr/>
-          <p:nvPr/>
-        </p:nvSpPr>
-        <p:spPr>
-          <a:xfrm>
-            <a:off x="10515600" y="2816352"/>
-            <a:ext cx="1051560" cy="237744"/>
-          </a:xfrm>
-          <a:prstGeom prst="rect">
-            <a:avLst/>
-          </a:prstGeom>
-          <a:noFill/>
-        </p:spPr>
-        <p:txBody>
-          <a:bodyPr wrap="square" lIns="0" tIns="0" rIns="0" bIns="0" rtlCol="0" anchor="ctr"/>
-          <a:lstStyle/>
-          <a:p>
-            <a:pPr marL="0" indent="0" algn="ctr">
-              <a:buNone/>
-            </a:pPr>
-            <a:r>
-              <a:rPr lang="en-US" sz="850" b="1" kern="0" spc="80" dirty="0">
-                <a:solidFill>
-                  <a:srgbClr val="C88A1E"/>
-                </a:solidFill>
-                <a:latin typeface="Calibri" panose="020F0502020204030204" pitchFamily="34" charset="0"/>
-                <a:ea typeface="Calibri" panose="020F0502020204030204" pitchFamily="34" charset="-122"/>
-                <a:cs typeface="Calibri" panose="020F0502020204030204" pitchFamily="34" charset="-120"/>
-              </a:rPr>
-              <a:t>IN PROGRESS</a:t>
-            </a:r>
-            <a:endParaRPr lang="en-US" sz="850" dirty="0"/>
-          </a:p>
-        </p:txBody>
-      </p:sp>
-      <p:sp>
-        <p:nvSpPr>
           <p:cNvPr id="18" name="Text 16"/>
           <p:cNvSpPr/>
-          <p:nvPr/>
+          <p:nvPr>
+            <p:custDataLst>
+              <p:tags r:id="rId5"/>
+            </p:custDataLst>
+          </p:nvPr>
         </p:nvSpPr>
         <p:spPr>
           <a:xfrm>
@@ -15950,7 +13779,11 @@
         <p:nvSpPr>
           <p:cNvPr id="19" name="Text 17"/>
           <p:cNvSpPr/>
-          <p:nvPr/>
+          <p:nvPr>
+            <p:custDataLst>
+              <p:tags r:id="rId6"/>
+            </p:custDataLst>
+          </p:nvPr>
         </p:nvSpPr>
         <p:spPr>
           <a:xfrm>
@@ -15986,74 +13819,13 @@
       </p:sp>
       <p:sp>
         <p:nvSpPr>
-          <p:cNvPr id="20" name="Shape 18"/>
-          <p:cNvSpPr/>
-          <p:nvPr/>
-        </p:nvSpPr>
-        <p:spPr>
-          <a:xfrm>
-            <a:off x="10515600" y="3474720"/>
-            <a:ext cx="1051560" cy="237744"/>
-          </a:xfrm>
-          <a:prstGeom prst="roundRect">
-            <a:avLst>
-              <a:gd name="adj" fmla="val 15385"/>
-            </a:avLst>
-          </a:prstGeom>
-          <a:solidFill>
-            <a:srgbClr val="FBF2DF"/>
-          </a:solidFill>
-          <a:ln w="12700">
-            <a:solidFill>
-              <a:srgbClr val="FBF2DF"/>
-            </a:solidFill>
-            <a:prstDash val="solid"/>
-          </a:ln>
-        </p:spPr>
-      </p:sp>
-      <p:sp>
-        <p:nvSpPr>
-          <p:cNvPr id="21" name="Text 19"/>
-          <p:cNvSpPr/>
-          <p:nvPr/>
-        </p:nvSpPr>
-        <p:spPr>
-          <a:xfrm>
-            <a:off x="10515600" y="3474720"/>
-            <a:ext cx="1051560" cy="237744"/>
-          </a:xfrm>
-          <a:prstGeom prst="rect">
-            <a:avLst/>
-          </a:prstGeom>
-          <a:noFill/>
-        </p:spPr>
-        <p:txBody>
-          <a:bodyPr wrap="square" lIns="0" tIns="0" rIns="0" bIns="0" rtlCol="0" anchor="ctr"/>
-          <a:lstStyle/>
-          <a:p>
-            <a:pPr marL="0" indent="0" algn="ctr">
-              <a:buNone/>
-            </a:pPr>
-            <a:r>
-              <a:rPr lang="en-US" sz="850" b="1" kern="0" spc="80" dirty="0">
-                <a:solidFill>
-                  <a:srgbClr val="C88A1E"/>
-                </a:solidFill>
-                <a:latin typeface="Calibri" panose="020F0502020204030204" pitchFamily="34" charset="0"/>
-                <a:ea typeface="Calibri" panose="020F0502020204030204" pitchFamily="34" charset="-122"/>
-                <a:cs typeface="Calibri" panose="020F0502020204030204" pitchFamily="34" charset="-120"/>
-              </a:rPr>
-              <a:t>IN PROGRESS</a:t>
-            </a:r>
-            <a:endParaRPr lang="en-US" sz="850" dirty="0"/>
-          </a:p>
-        </p:txBody>
-      </p:sp>
-      <p:sp>
-        <p:nvSpPr>
           <p:cNvPr id="22" name="Text 20"/>
           <p:cNvSpPr/>
-          <p:nvPr/>
+          <p:nvPr>
+            <p:custDataLst>
+              <p:tags r:id="rId7"/>
+            </p:custDataLst>
+          </p:nvPr>
         </p:nvSpPr>
         <p:spPr>
           <a:xfrm>
@@ -16091,7 +13863,11 @@
         <p:nvSpPr>
           <p:cNvPr id="23" name="Text 21"/>
           <p:cNvSpPr/>
-          <p:nvPr/>
+          <p:nvPr>
+            <p:custDataLst>
+              <p:tags r:id="rId8"/>
+            </p:custDataLst>
+          </p:nvPr>
         </p:nvSpPr>
         <p:spPr>
           <a:xfrm>
@@ -16127,74 +13903,13 @@
       </p:sp>
       <p:sp>
         <p:nvSpPr>
-          <p:cNvPr id="24" name="Shape 22"/>
-          <p:cNvSpPr/>
-          <p:nvPr/>
-        </p:nvSpPr>
-        <p:spPr>
-          <a:xfrm>
-            <a:off x="10515600" y="4133088"/>
-            <a:ext cx="1051560" cy="237744"/>
-          </a:xfrm>
-          <a:prstGeom prst="roundRect">
-            <a:avLst>
-              <a:gd name="adj" fmla="val 15385"/>
-            </a:avLst>
-          </a:prstGeom>
-          <a:solidFill>
-            <a:srgbClr val="FBF2DF"/>
-          </a:solidFill>
-          <a:ln w="12700">
-            <a:solidFill>
-              <a:srgbClr val="FBF2DF"/>
-            </a:solidFill>
-            <a:prstDash val="solid"/>
-          </a:ln>
-        </p:spPr>
-      </p:sp>
-      <p:sp>
-        <p:nvSpPr>
-          <p:cNvPr id="25" name="Text 23"/>
-          <p:cNvSpPr/>
-          <p:nvPr/>
-        </p:nvSpPr>
-        <p:spPr>
-          <a:xfrm>
-            <a:off x="10515600" y="4133088"/>
-            <a:ext cx="1051560" cy="237744"/>
-          </a:xfrm>
-          <a:prstGeom prst="rect">
-            <a:avLst/>
-          </a:prstGeom>
-          <a:noFill/>
-        </p:spPr>
-        <p:txBody>
-          <a:bodyPr wrap="square" lIns="0" tIns="0" rIns="0" bIns="0" rtlCol="0" anchor="ctr"/>
-          <a:lstStyle/>
-          <a:p>
-            <a:pPr marL="0" indent="0" algn="ctr">
-              <a:buNone/>
-            </a:pPr>
-            <a:r>
-              <a:rPr lang="en-US" sz="850" b="1" kern="0" spc="80" dirty="0">
-                <a:solidFill>
-                  <a:srgbClr val="C88A1E"/>
-                </a:solidFill>
-                <a:latin typeface="Calibri" panose="020F0502020204030204" pitchFamily="34" charset="0"/>
-                <a:ea typeface="Calibri" panose="020F0502020204030204" pitchFamily="34" charset="-122"/>
-                <a:cs typeface="Calibri" panose="020F0502020204030204" pitchFamily="34" charset="-120"/>
-              </a:rPr>
-              <a:t>IN PROGRESS</a:t>
-            </a:r>
-            <a:endParaRPr lang="en-US" sz="850" dirty="0"/>
-          </a:p>
-        </p:txBody>
-      </p:sp>
-      <p:sp>
-        <p:nvSpPr>
           <p:cNvPr id="26" name="Text 24"/>
           <p:cNvSpPr/>
-          <p:nvPr/>
+          <p:nvPr>
+            <p:custDataLst>
+              <p:tags r:id="rId9"/>
+            </p:custDataLst>
+          </p:nvPr>
         </p:nvSpPr>
         <p:spPr>
           <a:xfrm>
@@ -16232,7 +13947,11 @@
         <p:nvSpPr>
           <p:cNvPr id="27" name="Text 25"/>
           <p:cNvSpPr/>
-          <p:nvPr/>
+          <p:nvPr>
+            <p:custDataLst>
+              <p:tags r:id="rId10"/>
+            </p:custDataLst>
+          </p:nvPr>
         </p:nvSpPr>
         <p:spPr>
           <a:xfrm>
@@ -16268,42 +13987,19 @@
       </p:sp>
       <p:sp>
         <p:nvSpPr>
-          <p:cNvPr id="28" name="Shape 26"/>
-          <p:cNvSpPr/>
-          <p:nvPr/>
+          <p:cNvPr id="29" name="Text 27"/>
+          <p:cNvSpPr/>
+          <p:nvPr>
+            <p:custDataLst>
+              <p:tags r:id="rId11"/>
+            </p:custDataLst>
+          </p:nvPr>
         </p:nvSpPr>
         <p:spPr>
           <a:xfrm>
             <a:off x="10515600" y="4791456"/>
             <a:ext cx="1051560" cy="237744"/>
           </a:xfrm>
-          <a:prstGeom prst="roundRect">
-            <a:avLst>
-              <a:gd name="adj" fmla="val 15385"/>
-            </a:avLst>
-          </a:prstGeom>
-          <a:solidFill>
-            <a:srgbClr val="EAEEF1"/>
-          </a:solidFill>
-          <a:ln w="12700">
-            <a:solidFill>
-              <a:srgbClr val="EAEEF1"/>
-            </a:solidFill>
-            <a:prstDash val="solid"/>
-          </a:ln>
-        </p:spPr>
-      </p:sp>
-      <p:sp>
-        <p:nvSpPr>
-          <p:cNvPr id="29" name="Text 27"/>
-          <p:cNvSpPr/>
-          <p:nvPr/>
-        </p:nvSpPr>
-        <p:spPr>
-          <a:xfrm>
-            <a:off x="10515600" y="4791456"/>
-            <a:ext cx="1051560" cy="237744"/>
-          </a:xfrm>
           <a:prstGeom prst="rect">
             <a:avLst/>
           </a:prstGeom>
@@ -16316,17 +14012,6 @@
             <a:pPr marL="0" indent="0" algn="ctr">
               <a:buNone/>
             </a:pPr>
-            <a:r>
-              <a:rPr lang="en-US" sz="850" b="1" kern="0" spc="80" dirty="0">
-                <a:solidFill>
-                  <a:srgbClr val="5A6B78"/>
-                </a:solidFill>
-                <a:latin typeface="Calibri" panose="020F0502020204030204" pitchFamily="34" charset="0"/>
-                <a:ea typeface="Calibri" panose="020F0502020204030204" pitchFamily="34" charset="-122"/>
-                <a:cs typeface="Calibri" panose="020F0502020204030204" pitchFamily="34" charset="-120"/>
-              </a:rPr>
-              <a:t>NEXT</a:t>
-            </a:r>
             <a:endParaRPr lang="en-US" sz="850" dirty="0"/>
           </a:p>
         </p:txBody>
@@ -20102,7 +17787,7 @@
       </p:sp>
       <p:sp>
         <p:nvSpPr>
-          <p:cNvPr id="11" name="Shape 9"/>
+          <p:cNvPr id="12" name="Text 10"/>
           <p:cNvSpPr/>
           <p:nvPr/>
         </p:nvSpPr>
@@ -20111,33 +17796,6 @@
             <a:off x="850392" y="3639312"/>
             <a:ext cx="1188720" cy="237744"/>
           </a:xfrm>
-          <a:prstGeom prst="roundRect">
-            <a:avLst>
-              <a:gd name="adj" fmla="val 15385"/>
-            </a:avLst>
-          </a:prstGeom>
-          <a:solidFill>
-            <a:srgbClr val="E4F4EF"/>
-          </a:solidFill>
-          <a:ln w="12700">
-            <a:solidFill>
-              <a:srgbClr val="E4F4EF"/>
-            </a:solidFill>
-            <a:prstDash val="solid"/>
-          </a:ln>
-        </p:spPr>
-      </p:sp>
-      <p:sp>
-        <p:nvSpPr>
-          <p:cNvPr id="12" name="Text 10"/>
-          <p:cNvSpPr/>
-          <p:nvPr/>
-        </p:nvSpPr>
-        <p:spPr>
-          <a:xfrm>
-            <a:off x="850392" y="3639312"/>
-            <a:ext cx="1188720" cy="237744"/>
-          </a:xfrm>
           <a:prstGeom prst="rect">
             <a:avLst/>
           </a:prstGeom>
@@ -20150,17 +17808,6 @@
             <a:pPr marL="0" indent="0" algn="ctr">
               <a:buNone/>
             </a:pPr>
-            <a:r>
-              <a:rPr lang="en-US" sz="850" b="1" kern="0" spc="80" dirty="0">
-                <a:solidFill>
-                  <a:srgbClr val="0B7A5A"/>
-                </a:solidFill>
-                <a:latin typeface="Calibri" panose="020F0502020204030204" pitchFamily="34" charset="0"/>
-                <a:ea typeface="Calibri" panose="020F0502020204030204" pitchFamily="34" charset="-122"/>
-                <a:cs typeface="Calibri" panose="020F0502020204030204" pitchFamily="34" charset="-120"/>
-              </a:rPr>
-              <a:t>BUILT</a:t>
-            </a:r>
             <a:endParaRPr lang="en-US" sz="850" dirty="0"/>
           </a:p>
         </p:txBody>
@@ -20363,71 +18010,6 @@
       </p:sp>
       <p:sp>
         <p:nvSpPr>
-          <p:cNvPr id="19" name="Shape 17"/>
-          <p:cNvSpPr/>
-          <p:nvPr/>
-        </p:nvSpPr>
-        <p:spPr>
-          <a:xfrm>
-            <a:off x="3099816" y="3639312"/>
-            <a:ext cx="1188720" cy="237744"/>
-          </a:xfrm>
-          <a:prstGeom prst="roundRect">
-            <a:avLst>
-              <a:gd name="adj" fmla="val 15385"/>
-            </a:avLst>
-          </a:prstGeom>
-          <a:solidFill>
-            <a:srgbClr val="E4F4EF"/>
-          </a:solidFill>
-          <a:ln w="12700">
-            <a:solidFill>
-              <a:srgbClr val="E4F4EF"/>
-            </a:solidFill>
-            <a:prstDash val="solid"/>
-          </a:ln>
-        </p:spPr>
-      </p:sp>
-      <p:sp>
-        <p:nvSpPr>
-          <p:cNvPr id="20" name="Text 18"/>
-          <p:cNvSpPr/>
-          <p:nvPr/>
-        </p:nvSpPr>
-        <p:spPr>
-          <a:xfrm>
-            <a:off x="3099816" y="3639312"/>
-            <a:ext cx="1188720" cy="237744"/>
-          </a:xfrm>
-          <a:prstGeom prst="rect">
-            <a:avLst/>
-          </a:prstGeom>
-          <a:noFill/>
-        </p:spPr>
-        <p:txBody>
-          <a:bodyPr wrap="square" lIns="0" tIns="0" rIns="0" bIns="0" rtlCol="0" anchor="ctr"/>
-          <a:lstStyle/>
-          <a:p>
-            <a:pPr marL="0" indent="0" algn="ctr">
-              <a:buNone/>
-            </a:pPr>
-            <a:r>
-              <a:rPr lang="en-US" sz="850" b="1" kern="0" spc="80" dirty="0">
-                <a:solidFill>
-                  <a:srgbClr val="0B7A5A"/>
-                </a:solidFill>
-                <a:latin typeface="Calibri" panose="020F0502020204030204" pitchFamily="34" charset="0"/>
-                <a:ea typeface="Calibri" panose="020F0502020204030204" pitchFamily="34" charset="-122"/>
-                <a:cs typeface="Calibri" panose="020F0502020204030204" pitchFamily="34" charset="-120"/>
-              </a:rPr>
-              <a:t>BUILT</a:t>
-            </a:r>
-            <a:endParaRPr lang="en-US" sz="850" dirty="0"/>
-          </a:p>
-        </p:txBody>
-      </p:sp>
-      <p:sp>
-        <p:nvSpPr>
           <p:cNvPr id="21" name="Shape 19"/>
           <p:cNvSpPr/>
           <p:nvPr/>
@@ -20624,71 +18206,6 @@
       </p:sp>
       <p:sp>
         <p:nvSpPr>
-          <p:cNvPr id="27" name="Shape 25"/>
-          <p:cNvSpPr/>
-          <p:nvPr/>
-        </p:nvSpPr>
-        <p:spPr>
-          <a:xfrm>
-            <a:off x="5349240" y="3639312"/>
-            <a:ext cx="1188720" cy="237744"/>
-          </a:xfrm>
-          <a:prstGeom prst="roundRect">
-            <a:avLst>
-              <a:gd name="adj" fmla="val 15385"/>
-            </a:avLst>
-          </a:prstGeom>
-          <a:solidFill>
-            <a:srgbClr val="FBF2DF"/>
-          </a:solidFill>
-          <a:ln w="12700">
-            <a:solidFill>
-              <a:srgbClr val="FBF2DF"/>
-            </a:solidFill>
-            <a:prstDash val="solid"/>
-          </a:ln>
-        </p:spPr>
-      </p:sp>
-      <p:sp>
-        <p:nvSpPr>
-          <p:cNvPr id="28" name="Text 26"/>
-          <p:cNvSpPr/>
-          <p:nvPr/>
-        </p:nvSpPr>
-        <p:spPr>
-          <a:xfrm>
-            <a:off x="5349240" y="3639312"/>
-            <a:ext cx="1188720" cy="237744"/>
-          </a:xfrm>
-          <a:prstGeom prst="rect">
-            <a:avLst/>
-          </a:prstGeom>
-          <a:noFill/>
-        </p:spPr>
-        <p:txBody>
-          <a:bodyPr wrap="square" lIns="0" tIns="0" rIns="0" bIns="0" rtlCol="0" anchor="ctr"/>
-          <a:lstStyle/>
-          <a:p>
-            <a:pPr marL="0" indent="0" algn="ctr">
-              <a:buNone/>
-            </a:pPr>
-            <a:r>
-              <a:rPr lang="en-US" sz="850" b="1" kern="0" spc="80" dirty="0">
-                <a:solidFill>
-                  <a:srgbClr val="C88A1E"/>
-                </a:solidFill>
-                <a:latin typeface="Calibri" panose="020F0502020204030204" pitchFamily="34" charset="0"/>
-                <a:ea typeface="Calibri" panose="020F0502020204030204" pitchFamily="34" charset="-122"/>
-                <a:cs typeface="Calibri" panose="020F0502020204030204" pitchFamily="34" charset="-120"/>
-              </a:rPr>
-              <a:t>IN PROGRESS</a:t>
-            </a:r>
-            <a:endParaRPr lang="en-US" sz="850" dirty="0"/>
-          </a:p>
-        </p:txBody>
-      </p:sp>
-      <p:sp>
-        <p:nvSpPr>
           <p:cNvPr id="29" name="Shape 27"/>
           <p:cNvSpPr/>
           <p:nvPr/>
@@ -20885,7 +18402,7 @@
       </p:sp>
       <p:sp>
         <p:nvSpPr>
-          <p:cNvPr id="35" name="Shape 33"/>
+          <p:cNvPr id="36" name="Text 34"/>
           <p:cNvSpPr/>
           <p:nvPr/>
         </p:nvSpPr>
@@ -20894,33 +18411,6 @@
             <a:off x="7598664" y="3639312"/>
             <a:ext cx="1188720" cy="237744"/>
           </a:xfrm>
-          <a:prstGeom prst="roundRect">
-            <a:avLst>
-              <a:gd name="adj" fmla="val 15385"/>
-            </a:avLst>
-          </a:prstGeom>
-          <a:solidFill>
-            <a:srgbClr val="E4F4EF"/>
-          </a:solidFill>
-          <a:ln w="12700">
-            <a:solidFill>
-              <a:srgbClr val="E4F4EF"/>
-            </a:solidFill>
-            <a:prstDash val="solid"/>
-          </a:ln>
-        </p:spPr>
-      </p:sp>
-      <p:sp>
-        <p:nvSpPr>
-          <p:cNvPr id="36" name="Text 34"/>
-          <p:cNvSpPr/>
-          <p:nvPr/>
-        </p:nvSpPr>
-        <p:spPr>
-          <a:xfrm>
-            <a:off x="7598664" y="3639312"/>
-            <a:ext cx="1188720" cy="237744"/>
-          </a:xfrm>
           <a:prstGeom prst="rect">
             <a:avLst/>
           </a:prstGeom>
@@ -20933,17 +18423,6 @@
             <a:pPr marL="0" indent="0" algn="ctr">
               <a:buNone/>
             </a:pPr>
-            <a:r>
-              <a:rPr lang="en-US" sz="850" b="1" kern="0" spc="80" dirty="0">
-                <a:solidFill>
-                  <a:srgbClr val="0B7A5A"/>
-                </a:solidFill>
-                <a:latin typeface="Calibri" panose="020F0502020204030204" pitchFamily="34" charset="0"/>
-                <a:ea typeface="Calibri" panose="020F0502020204030204" pitchFamily="34" charset="-122"/>
-                <a:cs typeface="Calibri" panose="020F0502020204030204" pitchFamily="34" charset="-120"/>
-              </a:rPr>
-              <a:t>BUILT</a:t>
-            </a:r>
             <a:endParaRPr lang="en-US" sz="850" dirty="0"/>
           </a:p>
         </p:txBody>
@@ -21146,71 +18625,6 @@
       </p:sp>
       <p:sp>
         <p:nvSpPr>
-          <p:cNvPr id="43" name="Shape 41"/>
-          <p:cNvSpPr/>
-          <p:nvPr/>
-        </p:nvSpPr>
-        <p:spPr>
-          <a:xfrm>
-            <a:off x="9848088" y="3639312"/>
-            <a:ext cx="1188720" cy="237744"/>
-          </a:xfrm>
-          <a:prstGeom prst="roundRect">
-            <a:avLst>
-              <a:gd name="adj" fmla="val 15385"/>
-            </a:avLst>
-          </a:prstGeom>
-          <a:solidFill>
-            <a:srgbClr val="FBF2DF"/>
-          </a:solidFill>
-          <a:ln w="12700">
-            <a:solidFill>
-              <a:srgbClr val="FBF2DF"/>
-            </a:solidFill>
-            <a:prstDash val="solid"/>
-          </a:ln>
-        </p:spPr>
-      </p:sp>
-      <p:sp>
-        <p:nvSpPr>
-          <p:cNvPr id="44" name="Text 42"/>
-          <p:cNvSpPr/>
-          <p:nvPr/>
-        </p:nvSpPr>
-        <p:spPr>
-          <a:xfrm>
-            <a:off x="9848088" y="3639312"/>
-            <a:ext cx="1188720" cy="237744"/>
-          </a:xfrm>
-          <a:prstGeom prst="rect">
-            <a:avLst/>
-          </a:prstGeom>
-          <a:noFill/>
-        </p:spPr>
-        <p:txBody>
-          <a:bodyPr wrap="square" lIns="0" tIns="0" rIns="0" bIns="0" rtlCol="0" anchor="ctr"/>
-          <a:lstStyle/>
-          <a:p>
-            <a:pPr marL="0" indent="0" algn="ctr">
-              <a:buNone/>
-            </a:pPr>
-            <a:r>
-              <a:rPr lang="en-US" sz="850" b="1" kern="0" spc="80" dirty="0">
-                <a:solidFill>
-                  <a:srgbClr val="C88A1E"/>
-                </a:solidFill>
-                <a:latin typeface="Calibri" panose="020F0502020204030204" pitchFamily="34" charset="0"/>
-                <a:ea typeface="Calibri" panose="020F0502020204030204" pitchFamily="34" charset="-122"/>
-                <a:cs typeface="Calibri" panose="020F0502020204030204" pitchFamily="34" charset="-120"/>
-              </a:rPr>
-              <a:t>IN PROGRESS</a:t>
-            </a:r>
-            <a:endParaRPr lang="en-US" sz="850" dirty="0"/>
-          </a:p>
-        </p:txBody>
-      </p:sp>
-      <p:sp>
-        <p:nvSpPr>
           <p:cNvPr id="45" name="Shape 43"/>
           <p:cNvSpPr/>
           <p:nvPr/>
@@ -21459,6 +18873,204 @@
     <a:masterClrMapping/>
   </p:clrMapOvr>
 </p:sld>
+</file>
+
+<file path=ppt/tags/tag1.xml><?xml version="1.0" encoding="utf-8"?>
+<p:tagLst xmlns:p="http://schemas.openxmlformats.org/presentationml/2006/main">
+  <p:tag name="KSO_WM_DIAGRAM_VIRTUALLY_FRAME" val="{&quot;height&quot;:236.15999999999994,&quot;left&quot;:558,&quot;top&quot;:168.48,&quot;width&quot;:352.8}"/>
+</p:tagLst>
+</file>
+
+<file path=ppt/tags/tag10.xml><?xml version="1.0" encoding="utf-8"?>
+<p:tagLst xmlns:p="http://schemas.openxmlformats.org/presentationml/2006/main">
+  <p:tag name="KSO_WM_DIAGRAM_VIRTUALLY_FRAME" val="{&quot;height&quot;:236.15999999999994,&quot;left&quot;:558,&quot;top&quot;:168.48,&quot;width&quot;:352.8}"/>
+</p:tagLst>
+</file>
+
+<file path=ppt/tags/tag11.xml><?xml version="1.0" encoding="utf-8"?>
+<p:tagLst xmlns:p="http://schemas.openxmlformats.org/presentationml/2006/main">
+  <p:tag name="KSO_WM_DIAGRAM_VIRTUALLY_FRAME" val="{&quot;height&quot;:236.15999999999994,&quot;left&quot;:558,&quot;top&quot;:168.48,&quot;width&quot;:352.8}"/>
+</p:tagLst>
+</file>
+
+<file path=ppt/tags/tag12.xml><?xml version="1.0" encoding="utf-8"?>
+<p:tagLst xmlns:p="http://schemas.openxmlformats.org/presentationml/2006/main">
+  <p:tag name="KSO_WM_DIAGRAM_VIRTUALLY_FRAME" val="{&quot;height&quot;:332.64,&quot;left&quot;:46.8,&quot;top&quot;:133.2,&quot;width&quot;:619.2}"/>
+</p:tagLst>
+</file>
+
+<file path=ppt/tags/tag13.xml><?xml version="1.0" encoding="utf-8"?>
+<p:tagLst xmlns:p="http://schemas.openxmlformats.org/presentationml/2006/main">
+  <p:tag name="KSO_WM_DIAGRAM_VIRTUALLY_FRAME" val="{&quot;height&quot;:332.64,&quot;left&quot;:46.8,&quot;top&quot;:133.2,&quot;width&quot;:619.2}"/>
+</p:tagLst>
+</file>
+
+<file path=ppt/tags/tag14.xml><?xml version="1.0" encoding="utf-8"?>
+<p:tagLst xmlns:p="http://schemas.openxmlformats.org/presentationml/2006/main">
+  <p:tag name="KSO_WM_DIAGRAM_VIRTUALLY_FRAME" val="{&quot;height&quot;:332.64,&quot;left&quot;:46.8,&quot;top&quot;:133.2,&quot;width&quot;:619.2}"/>
+</p:tagLst>
+</file>
+
+<file path=ppt/tags/tag15.xml><?xml version="1.0" encoding="utf-8"?>
+<p:tagLst xmlns:p="http://schemas.openxmlformats.org/presentationml/2006/main">
+  <p:tag name="KSO_WM_DIAGRAM_VIRTUALLY_FRAME" val="{&quot;height&quot;:332.64,&quot;left&quot;:46.8,&quot;top&quot;:133.2,&quot;width&quot;:619.2}"/>
+</p:tagLst>
+</file>
+
+<file path=ppt/tags/tag16.xml><?xml version="1.0" encoding="utf-8"?>
+<p:tagLst xmlns:p="http://schemas.openxmlformats.org/presentationml/2006/main">
+  <p:tag name="KSO_WM_DIAGRAM_VIRTUALLY_FRAME" val="{&quot;height&quot;:332.64,&quot;left&quot;:46.8,&quot;top&quot;:133.2,&quot;width&quot;:619.2}"/>
+</p:tagLst>
+</file>
+
+<file path=ppt/tags/tag17.xml><?xml version="1.0" encoding="utf-8"?>
+<p:tagLst xmlns:p="http://schemas.openxmlformats.org/presentationml/2006/main">
+  <p:tag name="KSO_WM_DIAGRAM_VIRTUALLY_FRAME" val="{&quot;height&quot;:332.64,&quot;left&quot;:46.8,&quot;top&quot;:133.2,&quot;width&quot;:619.2}"/>
+</p:tagLst>
+</file>
+
+<file path=ppt/tags/tag18.xml><?xml version="1.0" encoding="utf-8"?>
+<p:tagLst xmlns:p="http://schemas.openxmlformats.org/presentationml/2006/main">
+  <p:tag name="KSO_WM_DIAGRAM_VIRTUALLY_FRAME" val="{&quot;height&quot;:332.64,&quot;left&quot;:46.8,&quot;top&quot;:133.2,&quot;width&quot;:619.2}"/>
+</p:tagLst>
+</file>
+
+<file path=ppt/tags/tag19.xml><?xml version="1.0" encoding="utf-8"?>
+<p:tagLst xmlns:p="http://schemas.openxmlformats.org/presentationml/2006/main">
+  <p:tag name="KSO_WM_DIAGRAM_VIRTUALLY_FRAME" val="{&quot;height&quot;:332.64,&quot;left&quot;:46.8,&quot;top&quot;:133.2,&quot;width&quot;:619.2}"/>
+</p:tagLst>
+</file>
+
+<file path=ppt/tags/tag2.xml><?xml version="1.0" encoding="utf-8"?>
+<p:tagLst xmlns:p="http://schemas.openxmlformats.org/presentationml/2006/main">
+  <p:tag name="KSO_WM_DIAGRAM_VIRTUALLY_FRAME" val="{&quot;height&quot;:236.15999999999994,&quot;left&quot;:558,&quot;top&quot;:168.48,&quot;width&quot;:352.8}"/>
+</p:tagLst>
+</file>
+
+<file path=ppt/tags/tag20.xml><?xml version="1.0" encoding="utf-8"?>
+<p:tagLst xmlns:p="http://schemas.openxmlformats.org/presentationml/2006/main">
+  <p:tag name="KSO_WM_DIAGRAM_VIRTUALLY_FRAME" val="{&quot;height&quot;:332.64,&quot;left&quot;:46.8,&quot;top&quot;:133.2,&quot;width&quot;:619.2}"/>
+</p:tagLst>
+</file>
+
+<file path=ppt/tags/tag21.xml><?xml version="1.0" encoding="utf-8"?>
+<p:tagLst xmlns:p="http://schemas.openxmlformats.org/presentationml/2006/main">
+  <p:tag name="KSO_WM_DIAGRAM_VIRTUALLY_FRAME" val="{&quot;height&quot;:332.64,&quot;left&quot;:46.8,&quot;top&quot;:133.2,&quot;width&quot;:619.2}"/>
+</p:tagLst>
+</file>
+
+<file path=ppt/tags/tag22.xml><?xml version="1.0" encoding="utf-8"?>
+<p:tagLst xmlns:p="http://schemas.openxmlformats.org/presentationml/2006/main">
+  <p:tag name="KSO_WM_DIAGRAM_VIRTUALLY_FRAME" val="{&quot;height&quot;:332.64,&quot;left&quot;:46.8,&quot;top&quot;:133.2,&quot;width&quot;:619.2}"/>
+</p:tagLst>
+</file>
+
+<file path=ppt/tags/tag23.xml><?xml version="1.0" encoding="utf-8"?>
+<p:tagLst xmlns:p="http://schemas.openxmlformats.org/presentationml/2006/main">
+  <p:tag name="KSO_WM_DIAGRAM_VIRTUALLY_FRAME" val="{&quot;height&quot;:332.64,&quot;left&quot;:46.8,&quot;top&quot;:133.2,&quot;width&quot;:619.2}"/>
+</p:tagLst>
+</file>
+
+<file path=ppt/tags/tag24.xml><?xml version="1.0" encoding="utf-8"?>
+<p:tagLst xmlns:p="http://schemas.openxmlformats.org/presentationml/2006/main">
+  <p:tag name="KSO_WM_DIAGRAM_VIRTUALLY_FRAME" val="{&quot;height&quot;:332.64,&quot;left&quot;:46.8,&quot;top&quot;:133.2,&quot;width&quot;:619.2}"/>
+</p:tagLst>
+</file>
+
+<file path=ppt/tags/tag25.xml><?xml version="1.0" encoding="utf-8"?>
+<p:tagLst xmlns:p="http://schemas.openxmlformats.org/presentationml/2006/main">
+  <p:tag name="KSO_WM_DIAGRAM_VIRTUALLY_FRAME" val="{&quot;height&quot;:332.64,&quot;left&quot;:46.8,&quot;top&quot;:133.2,&quot;width&quot;:619.2}"/>
+</p:tagLst>
+</file>
+
+<file path=ppt/tags/tag26.xml><?xml version="1.0" encoding="utf-8"?>
+<p:tagLst xmlns:p="http://schemas.openxmlformats.org/presentationml/2006/main">
+  <p:tag name="KSO_WM_DIAGRAM_VIRTUALLY_FRAME" val="{&quot;height&quot;:332.64,&quot;left&quot;:46.8,&quot;top&quot;:133.2,&quot;width&quot;:619.2}"/>
+</p:tagLst>
+</file>
+
+<file path=ppt/tags/tag27.xml><?xml version="1.0" encoding="utf-8"?>
+<p:tagLst xmlns:p="http://schemas.openxmlformats.org/presentationml/2006/main">
+  <p:tag name="KSO_WM_DIAGRAM_VIRTUALLY_FRAME" val="{&quot;height&quot;:332.64,&quot;left&quot;:46.8,&quot;top&quot;:133.2,&quot;width&quot;:619.2}"/>
+</p:tagLst>
+</file>
+
+<file path=ppt/tags/tag28.xml><?xml version="1.0" encoding="utf-8"?>
+<p:tagLst xmlns:p="http://schemas.openxmlformats.org/presentationml/2006/main">
+  <p:tag name="KSO_WM_DIAGRAM_VIRTUALLY_FRAME" val="{&quot;height&quot;:332.64,&quot;left&quot;:46.8,&quot;top&quot;:133.2,&quot;width&quot;:619.2}"/>
+</p:tagLst>
+</file>
+
+<file path=ppt/tags/tag29.xml><?xml version="1.0" encoding="utf-8"?>
+<p:tagLst xmlns:p="http://schemas.openxmlformats.org/presentationml/2006/main">
+  <p:tag name="KSO_WM_DIAGRAM_VIRTUALLY_FRAME" val="{&quot;height&quot;:332.64,&quot;left&quot;:46.8,&quot;top&quot;:133.2,&quot;width&quot;:619.2}"/>
+</p:tagLst>
+</file>
+
+<file path=ppt/tags/tag3.xml><?xml version="1.0" encoding="utf-8"?>
+<p:tagLst xmlns:p="http://schemas.openxmlformats.org/presentationml/2006/main">
+  <p:tag name="KSO_WM_DIAGRAM_VIRTUALLY_FRAME" val="{&quot;height&quot;:236.15999999999994,&quot;left&quot;:558,&quot;top&quot;:168.48,&quot;width&quot;:352.8}"/>
+</p:tagLst>
+</file>
+
+<file path=ppt/tags/tag30.xml><?xml version="1.0" encoding="utf-8"?>
+<p:tagLst xmlns:p="http://schemas.openxmlformats.org/presentationml/2006/main">
+  <p:tag name="KSO_WM_DIAGRAM_VIRTUALLY_FRAME" val="{&quot;height&quot;:332.64,&quot;left&quot;:46.8,&quot;top&quot;:133.2,&quot;width&quot;:619.2}"/>
+</p:tagLst>
+</file>
+
+<file path=ppt/tags/tag31.xml><?xml version="1.0" encoding="utf-8"?>
+<p:tagLst xmlns:p="http://schemas.openxmlformats.org/presentationml/2006/main">
+  <p:tag name="KSO_WM_DIAGRAM_VIRTUALLY_FRAME" val="{&quot;height&quot;:332.64,&quot;left&quot;:46.8,&quot;top&quot;:133.2,&quot;width&quot;:619.2}"/>
+</p:tagLst>
+</file>
+
+<file path=ppt/tags/tag32.xml><?xml version="1.0" encoding="utf-8"?>
+<p:tagLst xmlns:p="http://schemas.openxmlformats.org/presentationml/2006/main">
+  <p:tag name="KSO_WM_DIAGRAM_VIRTUALLY_FRAME" val="{&quot;height&quot;:332.64,&quot;left&quot;:46.8,&quot;top&quot;:133.2,&quot;width&quot;:619.2}"/>
+</p:tagLst>
+</file>
+
+<file path=ppt/tags/tag33.xml><?xml version="1.0" encoding="utf-8"?>
+<p:tagLst xmlns:p="http://schemas.openxmlformats.org/presentationml/2006/main">
+  <p:tag name="KSO_WM_DIAGRAM_VIRTUALLY_FRAME" val="{&quot;height&quot;:332.64,&quot;left&quot;:46.8,&quot;top&quot;:133.2,&quot;width&quot;:619.2}"/>
+</p:tagLst>
+</file>
+
+<file path=ppt/tags/tag4.xml><?xml version="1.0" encoding="utf-8"?>
+<p:tagLst xmlns:p="http://schemas.openxmlformats.org/presentationml/2006/main">
+  <p:tag name="KSO_WM_DIAGRAM_VIRTUALLY_FRAME" val="{&quot;height&quot;:236.15999999999994,&quot;left&quot;:558,&quot;top&quot;:168.48,&quot;width&quot;:352.8}"/>
+</p:tagLst>
+</file>
+
+<file path=ppt/tags/tag5.xml><?xml version="1.0" encoding="utf-8"?>
+<p:tagLst xmlns:p="http://schemas.openxmlformats.org/presentationml/2006/main">
+  <p:tag name="KSO_WM_DIAGRAM_VIRTUALLY_FRAME" val="{&quot;height&quot;:236.15999999999994,&quot;left&quot;:558,&quot;top&quot;:168.48,&quot;width&quot;:352.8}"/>
+</p:tagLst>
+</file>
+
+<file path=ppt/tags/tag6.xml><?xml version="1.0" encoding="utf-8"?>
+<p:tagLst xmlns:p="http://schemas.openxmlformats.org/presentationml/2006/main">
+  <p:tag name="KSO_WM_DIAGRAM_VIRTUALLY_FRAME" val="{&quot;height&quot;:236.15999999999994,&quot;left&quot;:558,&quot;top&quot;:168.48,&quot;width&quot;:352.8}"/>
+</p:tagLst>
+</file>
+
+<file path=ppt/tags/tag7.xml><?xml version="1.0" encoding="utf-8"?>
+<p:tagLst xmlns:p="http://schemas.openxmlformats.org/presentationml/2006/main">
+  <p:tag name="KSO_WM_DIAGRAM_VIRTUALLY_FRAME" val="{&quot;height&quot;:236.15999999999994,&quot;left&quot;:558,&quot;top&quot;:168.48,&quot;width&quot;:352.8}"/>
+</p:tagLst>
+</file>
+
+<file path=ppt/tags/tag8.xml><?xml version="1.0" encoding="utf-8"?>
+<p:tagLst xmlns:p="http://schemas.openxmlformats.org/presentationml/2006/main">
+  <p:tag name="KSO_WM_DIAGRAM_VIRTUALLY_FRAME" val="{&quot;height&quot;:236.15999999999994,&quot;left&quot;:558,&quot;top&quot;:168.48,&quot;width&quot;:352.8}"/>
+</p:tagLst>
+</file>
+
+<file path=ppt/tags/tag9.xml><?xml version="1.0" encoding="utf-8"?>
+<p:tagLst xmlns:p="http://schemas.openxmlformats.org/presentationml/2006/main">
+  <p:tag name="KSO_WM_DIAGRAM_VIRTUALLY_FRAME" val="{&quot;height&quot;:236.15999999999994,&quot;left&quot;:558,&quot;top&quot;:168.48,&quot;width&quot;:352.8}"/>
+</p:tagLst>
 </file>
 
 <file path=ppt/theme/theme1.xml><?xml version="1.0" encoding="utf-8"?>
